--- a/Topic_B/Exam_Practice/TB-L11_Speaking_Workshop_Topic_B_Speaking_and_Writing_Workshop.pptx
+++ b/Topic_B/Exam_Practice/TB-L11_Speaking_Workshop_Topic_B_Speaking_and_Writing_Workshop.pptx
@@ -615,7 +615,11 @@
           <a:lstStyle/>
           <a:p>
             <a:r>
-              <a:rPr lang="en-US" dirty="0"/>
+              <a:rPr lang="ar-SA" dirty="0">
+                <a:latin typeface="Amiri" pitchFamily="2" charset="-78"/>
+                <a:ea typeface="Amiri" pitchFamily="2" charset="-78"/>
+                <a:cs typeface="Amiri" pitchFamily="2" charset="-78"/>
+              </a:rPr>
               <a:t>ROLE PLAY C (Develop) — developing answers.
 SET-UP IN THE BREAKOUT ROOM: A = examiner (reads the left column ONLY — the questions, in order), B = candidate (sees the task column; Core may use the help column), C = observer (ticks the feedback checklist). 1 minute preparation, about 3 minutes speaking, 1 minute feedback, then rotate.
 Task ! is the unexpected question: in the exam the candidate has not seen it — the examiner should read it without warning.
@@ -707,7 +711,11 @@
           <a:lstStyle/>
           <a:p>
             <a:r>
-              <a:rPr lang="en-US" dirty="0"/>
+              <a:rPr lang="ar-SA" dirty="0">
+                <a:latin typeface="Amiri" pitchFamily="2" charset="-78"/>
+                <a:ea typeface="Amiri" pitchFamily="2" charset="-78"/>
+                <a:cs typeface="Amiri" pitchFamily="2" charset="-78"/>
+              </a:rPr>
               <a:t>ROLE PLAY D (Stretch) — a youth panel.
 SET-UP IN THE BREAKOUT ROOM: A = examiner (reads the left column ONLY — the questions, in order), B = candidate (sees the task column; Core may use the help column), C = observer (ticks the feedback checklist). 1 minute preparation, about 3 minutes speaking, 1 minute feedback, then rotate.
 Task ! is the unexpected question: in the exam the candidate has not seen it — the examiner should read it without warning.
@@ -1243,7 +1251,11 @@
           <a:lstStyle/>
           <a:p>
             <a:r>
-              <a:rPr lang="en-US" dirty="0"/>
+              <a:rPr lang="ar-SA" dirty="0">
+                <a:latin typeface="Amiri" pitchFamily="2" charset="-78"/>
+                <a:ea typeface="Amiri" pitchFamily="2" charset="-78"/>
+                <a:cs typeface="Amiri" pitchFamily="2" charset="-78"/>
+              </a:rPr>
               <a:t>TOPIC CONVERSATION — Core. Examiner asks the questions in order and may add “لِمَاذَا؟ / هَلْ يُمْكِنُ أَنْ تَشْرَحَ أَكْثَرَ؟” to push for more. Candidate aims for one full sentence per question, from every part of Topic B.
 </a:t>
             </a:r>
@@ -1332,7 +1344,11 @@
           <a:lstStyle/>
           <a:p>
             <a:r>
-              <a:rPr lang="en-US" dirty="0"/>
+              <a:rPr lang="ar-SA" dirty="0">
+                <a:latin typeface="Amiri" pitchFamily="2" charset="-78"/>
+                <a:ea typeface="Amiri" pitchFamily="2" charset="-78"/>
+                <a:cs typeface="Amiri" pitchFamily="2" charset="-78"/>
+              </a:rPr>
               <a:t>TOPIC CONVERSATION — Develop. Examiner asks the questions in order and may add “لِمَاذَا؟ / هَلْ يُمْكِنُ أَنْ تَشْرَحَ أَكْثَرَ؟” to push for more. Candidate aims for two or three linked sentences in two time frames.
 </a:t>
             </a:r>
@@ -1421,7 +1437,11 @@
           <a:lstStyle/>
           <a:p>
             <a:r>
-              <a:rPr lang="en-US" dirty="0"/>
+              <a:rPr lang="ar-SA" dirty="0">
+                <a:latin typeface="Amiri" pitchFamily="2" charset="-78"/>
+                <a:ea typeface="Amiri" pitchFamily="2" charset="-78"/>
+                <a:cs typeface="Amiri" pitchFamily="2" charset="-78"/>
+              </a:rPr>
               <a:t>TOPIC CONVERSATION — Stretch. Examiner asks the questions in order and may add “لِمَاذَا؟ / هَلْ يُمْكِنُ أَنْ تَشْرَحَ أَكْثَرَ؟” to push for more. Candidate aims for a developed answer: opinion, comparison, concession and a conditional.
 </a:t>
             </a:r>
@@ -1510,7 +1530,11 @@
           <a:lstStyle/>
           <a:p>
             <a:r>
-              <a:rPr lang="en-US" dirty="0"/>
+              <a:rPr lang="ar-SA" dirty="0">
+                <a:latin typeface="Amiri" pitchFamily="2" charset="-78"/>
+                <a:ea typeface="Amiri" pitchFamily="2" charset="-78"/>
+                <a:cs typeface="Amiri" pitchFamily="2" charset="-78"/>
+              </a:rPr>
               <a:t>WELCOME (1 min) — while students join.
 • Greet each student by name as they arrive: السَّلَامُ عَلَيْكُمْ. Take the register (Pastoral Tracker: attendance 0/1).
 • 2-MINUTE CHECK-IN (SEND training): a private chat to any student who seemed unsettled last lesson — “Are you okay today? 👍 / 👎”.
@@ -2224,7 +2248,11 @@
           <a:lstStyle/>
           <a:p>
             <a:r>
-              <a:rPr lang="en-US" dirty="0"/>
+              <a:rPr lang="ar-SA" dirty="0">
+                <a:latin typeface="Amiri" pitchFamily="2" charset="-78"/>
+                <a:ea typeface="Amiri" pitchFamily="2" charset="-78"/>
+                <a:cs typeface="Amiri" pitchFamily="2" charset="-78"/>
+              </a:rPr>
               <a:t>TEACH (3 min). Role play = precise and complete; conversation = develop. Choral repetition of the repair phrases. To a girl: تُعِيدِي.</a:t>
             </a:r>
             <a:endParaRPr lang="en-US" dirty="0"/>
@@ -2576,7 +2604,11 @@
           <a:lstStyle/>
           <a:p>
             <a:r>
-              <a:rPr lang="en-US" dirty="0"/>
+              <a:rPr lang="ar-SA" dirty="0">
+                <a:latin typeface="Amiri" pitchFamily="2" charset="-78"/>
+                <a:ea typeface="Amiri" pitchFamily="2" charset="-78"/>
+                <a:cs typeface="Amiri" pitchFamily="2" charset="-78"/>
+              </a:rPr>
               <a:t>ROLE PLAY A (Core) — a summer-camp interview.
 SET-UP IN THE BREAKOUT ROOM: A = examiner (reads the left column ONLY — the questions, in order), B = candidate (sees the task column; Core may use the help column), C = observer (ticks the feedback checklist). 1 minute preparation, about 3 minutes speaking, 1 minute feedback, then rotate.
 Task ! is the unexpected question: in the exam the candidate has not seen it — the examiner should read it without warning.
@@ -2668,7 +2700,11 @@
           <a:lstStyle/>
           <a:p>
             <a:r>
-              <a:rPr lang="en-US" dirty="0"/>
+              <a:rPr lang="ar-SA" dirty="0">
+                <a:latin typeface="Amiri" pitchFamily="2" charset="-78"/>
+                <a:ea typeface="Amiri" pitchFamily="2" charset="-78"/>
+                <a:cs typeface="Amiri" pitchFamily="2" charset="-78"/>
+              </a:rPr>
               <a:t>ROLE PLAY B (Core+) — a host-family call.
 SET-UP IN THE BREAKOUT ROOM: A = examiner (reads the left column ONLY — the questions, in order), B = candidate (sees the task column; Core may use the help column), C = observer (ticks the feedback checklist). 1 minute preparation, about 3 minutes speaking, 1 minute feedback, then rotate.
 Task ! is the unexpected question: in the exam the candidate has not seen it — the examiner should read it without warning.
@@ -3156,6 +3192,7 @@
                   <a:srgbClr val="D4AF37"/>
                 </a:solidFill>
                 <a:latin typeface="Amiri" pitchFamily="2" charset="-78"/>
+                <a:ea typeface="Amiri" pitchFamily="2" charset="-78"/>
                 <a:cs typeface="Amiri" pitchFamily="2" charset="-78"/>
               </a:rPr>
               <a:t>م</a:t>
@@ -3362,6 +3399,7 @@
                   <a:srgbClr val="D4AF37"/>
                 </a:solidFill>
                 <a:latin typeface="Amiri" pitchFamily="2" charset="-78"/>
+                <a:ea typeface="Amiri" pitchFamily="2" charset="-78"/>
                 <a:cs typeface="Amiri" pitchFamily="2" charset="-78"/>
               </a:rPr>
               <a:t>وَرْشَةُ التَّحَدُّثِ — هٰذَا أَنَا</a:t>
@@ -3819,6 +3857,7 @@
                   <a:srgbClr val="D4AF37"/>
                 </a:solidFill>
                 <a:latin typeface="Amiri" pitchFamily="2" charset="-78"/>
+                <a:ea typeface="Amiri" pitchFamily="2" charset="-78"/>
                 <a:cs typeface="Amiri" pitchFamily="2" charset="-78"/>
               </a:rPr>
               <a:t>م</a:t>
@@ -4139,6 +4178,7 @@
                   <a:srgbClr val="8A6D1E"/>
                 </a:solidFill>
                 <a:latin typeface="Amiri" pitchFamily="2" charset="-78"/>
+                <a:ea typeface="Amiri" pitchFamily="2" charset="-78"/>
                 <a:cs typeface="Amiri" pitchFamily="2" charset="-78"/>
               </a:rPr>
               <a:t>تَكَلَّمْ أَكْثَرَ!</a:t>
@@ -4419,6 +4459,7 @@
                   <a:srgbClr val="1B3B6F"/>
                 </a:solidFill>
                 <a:latin typeface="Amiri" pitchFamily="2" charset="-78"/>
+                <a:ea typeface="Amiri" pitchFamily="2" charset="-78"/>
                 <a:cs typeface="Amiri" pitchFamily="2" charset="-78"/>
               </a:rPr>
               <a:t>نَعَمْ، لِأَنَّ … مَثَلًا …</a:t>
@@ -4495,6 +4536,7 @@
                   <a:srgbClr val="1B3B6F"/>
                 </a:solidFill>
                 <a:latin typeface="Amiri" pitchFamily="2" charset="-78"/>
+                <a:ea typeface="Amiri" pitchFamily="2" charset="-78"/>
                 <a:cs typeface="Amiri" pitchFamily="2" charset="-78"/>
               </a:rPr>
               <a:t>هَلْ تُحِبُّ مَدِينَتَكَ؟</a:t>
@@ -4598,6 +4640,7 @@
                   <a:srgbClr val="1B3B6F"/>
                 </a:solidFill>
                 <a:latin typeface="Amiri" pitchFamily="2" charset="-78"/>
+                <a:ea typeface="Amiri" pitchFamily="2" charset="-78"/>
                 <a:cs typeface="Amiri" pitchFamily="2" charset="-78"/>
               </a:rPr>
               <a:t>كُنْتُ … أَمَّا الآنَ فَأَتَكَلَّمُ …</a:t>
@@ -4674,6 +4717,7 @@
                   <a:srgbClr val="1B3B6F"/>
                 </a:solidFill>
                 <a:latin typeface="Amiri" pitchFamily="2" charset="-78"/>
+                <a:ea typeface="Amiri" pitchFamily="2" charset="-78"/>
                 <a:cs typeface="Amiri" pitchFamily="2" charset="-78"/>
               </a:rPr>
               <a:t>كَيْفَ تَغَيَّرْتَ فِي السَّنَوَاتِ الأَخِيرَةِ؟</a:t>
@@ -4777,6 +4821,7 @@
                   <a:srgbClr val="1B3B6F"/>
                 </a:solidFill>
                 <a:latin typeface="Amiri" pitchFamily="2" charset="-78"/>
+                <a:ea typeface="Amiri" pitchFamily="2" charset="-78"/>
                 <a:cs typeface="Amiri" pitchFamily="2" charset="-78"/>
               </a:rPr>
               <a:t>… لِأَنَّهُ … أَكْثَرُ مِنْ …</a:t>
@@ -4853,6 +4898,7 @@
                   <a:srgbClr val="1B3B6F"/>
                 </a:solidFill>
                 <a:latin typeface="Amiri" pitchFamily="2" charset="-78"/>
+                <a:ea typeface="Amiri" pitchFamily="2" charset="-78"/>
                 <a:cs typeface="Amiri" pitchFamily="2" charset="-78"/>
               </a:rPr>
               <a:t>مَنْ أَهَمُّ شَخْصٍ فِي حَيَاتِكَ؟</a:t>
@@ -4956,6 +5002,7 @@
                   <a:srgbClr val="1B3B6F"/>
                 </a:solidFill>
                 <a:latin typeface="Amiri" pitchFamily="2" charset="-78"/>
+                <a:ea typeface="Amiri" pitchFamily="2" charset="-78"/>
                 <a:cs typeface="Amiri" pitchFamily="2" charset="-78"/>
               </a:rPr>
               <a:t>أَوَّلًا … ثُمَّ … وَأَخِيرًا …</a:t>
@@ -5032,6 +5079,7 @@
                   <a:srgbClr val="1B3B6F"/>
                 </a:solidFill>
                 <a:latin typeface="Amiri" pitchFamily="2" charset="-78"/>
+                <a:ea typeface="Amiri" pitchFamily="2" charset="-78"/>
                 <a:cs typeface="Amiri" pitchFamily="2" charset="-78"/>
               </a:rPr>
               <a:t>مَاذَا فَعَلْتَ فِي نِهَايَةِ الأُسْبُوعِ؟</a:t>
@@ -5135,6 +5183,7 @@
                   <a:srgbClr val="1B3B6F"/>
                 </a:solidFill>
                 <a:latin typeface="Amiri" pitchFamily="2" charset="-78"/>
+                <a:ea typeface="Amiri" pitchFamily="2" charset="-78"/>
                 <a:cs typeface="Amiri" pitchFamily="2" charset="-78"/>
               </a:rPr>
               <a:t>أَتَمَنَّى أَنْ … لِأَنَّ … وَلِذٰلِكَ …</a:t>
@@ -5211,6 +5260,7 @@
                   <a:srgbClr val="1B3B6F"/>
                 </a:solidFill>
                 <a:latin typeface="Amiri" pitchFamily="2" charset="-78"/>
+                <a:ea typeface="Amiri" pitchFamily="2" charset="-78"/>
                 <a:cs typeface="Amiri" pitchFamily="2" charset="-78"/>
               </a:rPr>
               <a:t>وَمَا خُطَطُكَ لِلْمُسْتَقْبَلِ؟</a:t>
@@ -5420,6 +5470,7 @@
                   <a:srgbClr val="D4AF37"/>
                 </a:solidFill>
                 <a:latin typeface="Amiri" pitchFamily="2" charset="-78"/>
+                <a:ea typeface="Amiri" pitchFamily="2" charset="-78"/>
                 <a:cs typeface="Amiri" pitchFamily="2" charset="-78"/>
               </a:rPr>
               <a:t>م</a:t>
@@ -5740,6 +5791,7 @@
                   <a:srgbClr val="8A6D1E"/>
                 </a:solidFill>
                 <a:latin typeface="Amiri" pitchFamily="2" charset="-78"/>
+                <a:ea typeface="Amiri" pitchFamily="2" charset="-78"/>
                 <a:cs typeface="Amiri" pitchFamily="2" charset="-78"/>
               </a:rPr>
               <a:t>أَنْ تَكُونَ شَابًّا اليَوْمَ</a:t>
@@ -6020,6 +6072,7 @@
                   <a:srgbClr val="1B3B6F"/>
                 </a:solidFill>
                 <a:latin typeface="Amiri" pitchFamily="2" charset="-78"/>
+                <a:ea typeface="Amiri" pitchFamily="2" charset="-78"/>
                 <a:cs typeface="Amiri" pitchFamily="2" charset="-78"/>
               </a:rPr>
               <a:t>أَعْتَقِدُ أَنَّ … لِأَنَّ … بِالإِضَافَةِ إِلَى …</a:t>
@@ -6096,6 +6149,7 @@
                   <a:srgbClr val="1B3B6F"/>
                 </a:solidFill>
                 <a:latin typeface="Amiri" pitchFamily="2" charset="-78"/>
+                <a:ea typeface="Amiri" pitchFamily="2" charset="-78"/>
                 <a:cs typeface="Amiri" pitchFamily="2" charset="-78"/>
               </a:rPr>
               <a:t>مَا أَصْعَبُ شَيْءٍ فِي حَيَاةِ الشَّبَابِ اليَوْمَ؟</a:t>
@@ -6199,6 +6253,7 @@
                   <a:srgbClr val="1B3B6F"/>
                 </a:solidFill>
                 <a:latin typeface="Amiri" pitchFamily="2" charset="-78"/>
+                <a:ea typeface="Amiri" pitchFamily="2" charset="-78"/>
                 <a:cs typeface="Amiri" pitchFamily="2" charset="-78"/>
               </a:rPr>
               <a:t>صَحِيحٌ أَنَّ … غَيْرَ أَنَّ …</a:t>
@@ -6275,6 +6330,7 @@
                   <a:srgbClr val="1B3B6F"/>
                 </a:solidFill>
                 <a:latin typeface="Amiri" pitchFamily="2" charset="-78"/>
+                <a:ea typeface="Amiri" pitchFamily="2" charset="-78"/>
                 <a:cs typeface="Amiri" pitchFamily="2" charset="-78"/>
               </a:rPr>
               <a:t>هَلْ كَانَتْ حَيَاةُ وَالِدَيْكَ أَسْهَلَ؟</a:t>
@@ -6378,6 +6434,7 @@
                   <a:srgbClr val="1B3B6F"/>
                 </a:solidFill>
                 <a:latin typeface="Amiri" pitchFamily="2" charset="-78"/>
+                <a:ea typeface="Amiri" pitchFamily="2" charset="-78"/>
                 <a:cs typeface="Amiri" pitchFamily="2" charset="-78"/>
               </a:rPr>
               <a:t>فِي أُسْرَتِي مَثَلًا … فَأَسْتَطِيعُ …</a:t>
@@ -6454,6 +6511,7 @@
                   <a:srgbClr val="1B3B6F"/>
                 </a:solidFill>
                 <a:latin typeface="Amiri" pitchFamily="2" charset="-78"/>
+                <a:ea typeface="Amiri" pitchFamily="2" charset="-78"/>
                 <a:cs typeface="Amiri" pitchFamily="2" charset="-78"/>
               </a:rPr>
               <a:t>مَا دَوْرُ الأُسْرَةِ فِي مُسَاعَدَةِ الشَّبَابِ؟</a:t>
@@ -6557,6 +6615,7 @@
                   <a:srgbClr val="1B3B6F"/>
                 </a:solidFill>
                 <a:latin typeface="Amiri" pitchFamily="2" charset="-78"/>
+                <a:ea typeface="Amiri" pitchFamily="2" charset="-78"/>
                 <a:cs typeface="Amiri" pitchFamily="2" charset="-78"/>
               </a:rPr>
               <a:t>عِنْدَمَا … تَعَلَّمْتُ أَنَّ …</a:t>
@@ -6633,6 +6692,7 @@
                   <a:srgbClr val="1B3B6F"/>
                 </a:solidFill>
                 <a:latin typeface="Amiri" pitchFamily="2" charset="-78"/>
+                <a:ea typeface="Amiri" pitchFamily="2" charset="-78"/>
                 <a:cs typeface="Amiri" pitchFamily="2" charset="-78"/>
               </a:rPr>
               <a:t>مَا الَّذِي تَعَلَّمْتَهُ مِنْ تَجْرِبَةٍ صَعْبَةٍ؟</a:t>
@@ -6736,6 +6796,7 @@
                   <a:srgbClr val="1B3B6F"/>
                 </a:solidFill>
                 <a:latin typeface="Amiri" pitchFamily="2" charset="-78"/>
+                <a:ea typeface="Amiri" pitchFamily="2" charset="-78"/>
                 <a:cs typeface="Amiri" pitchFamily="2" charset="-78"/>
               </a:rPr>
               <a:t>لَوْ كَتَبْتُ …، لَقُلْتُ …</a:t>
@@ -6812,6 +6873,7 @@
                   <a:srgbClr val="1B3B6F"/>
                 </a:solidFill>
                 <a:latin typeface="Amiri" pitchFamily="2" charset="-78"/>
+                <a:ea typeface="Amiri" pitchFamily="2" charset="-78"/>
                 <a:cs typeface="Amiri" pitchFamily="2" charset="-78"/>
               </a:rPr>
               <a:t>لَوْ كَتَبْتَ رِسَالَةً لِنَفْسِكَ بَعْدَ عَشْرِ سَنَوَاتٍ، مَاذَا تَقُولُ؟</a:t>
@@ -7021,6 +7083,7 @@
                   <a:srgbClr val="D4AF37"/>
                 </a:solidFill>
                 <a:latin typeface="Amiri" pitchFamily="2" charset="-78"/>
+                <a:ea typeface="Amiri" pitchFamily="2" charset="-78"/>
                 <a:cs typeface="Amiri" pitchFamily="2" charset="-78"/>
               </a:rPr>
               <a:t>م</a:t>
@@ -7341,6 +7404,7 @@
                   <a:srgbClr val="8A6D1E"/>
                 </a:solidFill>
                 <a:latin typeface="Amiri" pitchFamily="2" charset="-78"/>
+                <a:ea typeface="Amiri" pitchFamily="2" charset="-78"/>
                 <a:cs typeface="Amiri" pitchFamily="2" charset="-78"/>
               </a:rPr>
               <a:t>وَرَقَةُ المُلَاحِظِ</a:t>
@@ -8811,6 +8875,7 @@
                   <a:srgbClr val="D4AF37"/>
                 </a:solidFill>
                 <a:latin typeface="Amiri" pitchFamily="2" charset="-78"/>
+                <a:ea typeface="Amiri" pitchFamily="2" charset="-78"/>
                 <a:cs typeface="Amiri" pitchFamily="2" charset="-78"/>
               </a:rPr>
               <a:t>م</a:t>
@@ -9131,6 +9196,7 @@
                   <a:srgbClr val="8A6D1E"/>
                 </a:solidFill>
                 <a:latin typeface="Amiri" pitchFamily="2" charset="-78"/>
+                <a:ea typeface="Amiri" pitchFamily="2" charset="-78"/>
                 <a:cs typeface="Amiri" pitchFamily="2" charset="-78"/>
               </a:rPr>
               <a:t>نَمُوذَجُ الإِجَابَةِ</a:t>
@@ -9373,6 +9439,7 @@
                   <a:srgbClr val="1B3B6F"/>
                 </a:solidFill>
                 <a:latin typeface="Amiri" pitchFamily="2" charset="-78"/>
+                <a:ea typeface="Amiri" pitchFamily="2" charset="-78"/>
                 <a:cs typeface="Amiri" pitchFamily="2" charset="-78"/>
               </a:rPr>
               <a:t>اسْمِي عُمَرُ، وَعُمْرِي خَمْسَ عَشْرَةَ سَنَةً، وَأَسْكُنُ فِي بَرْمِنْغْهَامَ.</a:t>
@@ -9449,6 +9516,7 @@
                   <a:srgbClr val="1B3B6F"/>
                 </a:solidFill>
                 <a:latin typeface="Amiri" pitchFamily="2" charset="-78"/>
+                <a:ea typeface="Amiri" pitchFamily="2" charset="-78"/>
                 <a:cs typeface="Amiri" pitchFamily="2" charset="-78"/>
               </a:rPr>
               <a:t>أَهْلًا! عَرِّفْنَا بِنَفْسِكَ.</a:t>
@@ -9552,6 +9620,7 @@
                   <a:srgbClr val="1B3B6F"/>
                 </a:solidFill>
                 <a:latin typeface="Amiri" pitchFamily="2" charset="-78"/>
+                <a:ea typeface="Amiri" pitchFamily="2" charset="-78"/>
                 <a:cs typeface="Amiri" pitchFamily="2" charset="-78"/>
               </a:rPr>
               <a:t>فِي أُسْرَتِي خَمْسَةُ أَشْخَاصٍ؛ أَبِي مُهَنْدِسٌ، وَأُمِّي مُعَلِّمَةٌ، وَعِنْدِي أُخْتَانِ.</a:t>
@@ -9628,6 +9697,7 @@
                   <a:srgbClr val="1B3B6F"/>
                 </a:solidFill>
                 <a:latin typeface="Amiri" pitchFamily="2" charset="-78"/>
+                <a:ea typeface="Amiri" pitchFamily="2" charset="-78"/>
                 <a:cs typeface="Amiri" pitchFamily="2" charset="-78"/>
               </a:rPr>
               <a:t>مَنْ فِي أُسْرَتِكَ؟</a:t>
@@ -9731,6 +9801,7 @@
                   <a:srgbClr val="1B3B6F"/>
                 </a:solidFill>
                 <a:latin typeface="Amiri" pitchFamily="2" charset="-78"/>
+                <a:ea typeface="Amiri" pitchFamily="2" charset="-78"/>
                 <a:cs typeface="Amiri" pitchFamily="2" charset="-78"/>
               </a:rPr>
               <a:t>أَنَا اجْتِمَاعِيٌّ وَمُنَظَّمٌ، وَأُحِبُّ العَمَلَ مَعَ الآخَرِينَ.</a:t>
@@ -9807,6 +9878,7 @@
                   <a:srgbClr val="1B3B6F"/>
                 </a:solidFill>
                 <a:latin typeface="Amiri" pitchFamily="2" charset="-78"/>
+                <a:ea typeface="Amiri" pitchFamily="2" charset="-78"/>
                 <a:cs typeface="Amiri" pitchFamily="2" charset="-78"/>
               </a:rPr>
               <a:t>صِفْ شَخْصِيَّتَكَ.</a:t>
@@ -9910,6 +9982,7 @@
                   <a:srgbClr val="1B3B6F"/>
                 </a:solidFill>
                 <a:latin typeface="Amiri" pitchFamily="2" charset="-78"/>
+                <a:ea typeface="Amiri" pitchFamily="2" charset="-78"/>
                 <a:cs typeface="Amiri" pitchFamily="2" charset="-78"/>
               </a:rPr>
               <a:t>أُحِبُّ السِّبَاحَةَ وَالطَّبْخَ، وَأَسْبَحُ مَرَّتَيْنِ فِي الأُسْبُوعِ.</a:t>
@@ -9986,6 +10059,7 @@
                   <a:srgbClr val="1B3B6F"/>
                 </a:solidFill>
                 <a:latin typeface="Amiri" pitchFamily="2" charset="-78"/>
+                <a:ea typeface="Amiri" pitchFamily="2" charset="-78"/>
                 <a:cs typeface="Amiri" pitchFamily="2" charset="-78"/>
               </a:rPr>
               <a:t>مَا هِوَايَاتُكَ؟</a:t>
@@ -10089,6 +10163,7 @@
                   <a:srgbClr val="1B3B6F"/>
                 </a:solidFill>
                 <a:latin typeface="Amiri" pitchFamily="2" charset="-78"/>
+                <a:ea typeface="Amiri" pitchFamily="2" charset="-78"/>
                 <a:cs typeface="Amiri" pitchFamily="2" charset="-78"/>
               </a:rPr>
               <a:t>لِأَنِّي أُرِيدُ أَنْ أَتَعَرَّفَ عَلَى أَصْدِقَاءَ جُدُدٍ، وَأَنْ أُحَسِّنَ لُغَتِي العَرَبِيَّةَ.</a:t>
@@ -10165,6 +10240,7 @@
                   <a:srgbClr val="1B3B6F"/>
                 </a:solidFill>
                 <a:latin typeface="Amiri" pitchFamily="2" charset="-78"/>
+                <a:ea typeface="Amiri" pitchFamily="2" charset="-78"/>
                 <a:cs typeface="Amiri" pitchFamily="2" charset="-78"/>
               </a:rPr>
               <a:t>لِمَاذَا تُرِيدُ أَنْ تَأْتِيَ إِلَى المُخَيَّمِ؟</a:t>
@@ -10374,6 +10450,7 @@
                   <a:srgbClr val="D4AF37"/>
                 </a:solidFill>
                 <a:latin typeface="Amiri" pitchFamily="2" charset="-78"/>
+                <a:ea typeface="Amiri" pitchFamily="2" charset="-78"/>
                 <a:cs typeface="Amiri" pitchFamily="2" charset="-78"/>
               </a:rPr>
               <a:t>م</a:t>
@@ -10694,6 +10771,7 @@
                   <a:srgbClr val="8A6D1E"/>
                 </a:solidFill>
                 <a:latin typeface="Amiri" pitchFamily="2" charset="-78"/>
+                <a:ea typeface="Amiri" pitchFamily="2" charset="-78"/>
                 <a:cs typeface="Amiri" pitchFamily="2" charset="-78"/>
               </a:rPr>
               <a:t>نَمُوذَجُ الإِجَابَةِ</a:t>
@@ -10936,6 +11014,7 @@
                   <a:srgbClr val="1B3B6F"/>
                 </a:solidFill>
                 <a:latin typeface="Amiri" pitchFamily="2" charset="-78"/>
+                <a:ea typeface="Amiri" pitchFamily="2" charset="-78"/>
                 <a:cs typeface="Amiri" pitchFamily="2" charset="-78"/>
               </a:rPr>
               <a:t>نَسْكُنُ فِي بَيْتٍ صَغِيرٍ، فِيهِ ثَلَاثُ غُرَفِ نَوْمٍ وَحَدِيقَةٌ.</a:t>
@@ -11012,6 +11091,7 @@
                   <a:srgbClr val="1B3B6F"/>
                 </a:solidFill>
                 <a:latin typeface="Amiri" pitchFamily="2" charset="-78"/>
+                <a:ea typeface="Amiri" pitchFamily="2" charset="-78"/>
                 <a:cs typeface="Amiri" pitchFamily="2" charset="-78"/>
               </a:rPr>
               <a:t>صِفْ لَنَا بَيْتَكَ.</a:t>
@@ -11115,6 +11195,7 @@
                   <a:srgbClr val="1B3B6F"/>
                 </a:solidFill>
                 <a:latin typeface="Amiri" pitchFamily="2" charset="-78"/>
+                <a:ea typeface="Amiri" pitchFamily="2" charset="-78"/>
                 <a:cs typeface="Amiri" pitchFamily="2" charset="-78"/>
               </a:rPr>
               <a:t>نَعَمْ، أُشَارِكُهَا مَعَ أَخِي، لِأَنَّ البَيْتَ لَيْسَ كَبِيرًا.</a:t>
@@ -11191,6 +11272,7 @@
                   <a:srgbClr val="1B3B6F"/>
                 </a:solidFill>
                 <a:latin typeface="Amiri" pitchFamily="2" charset="-78"/>
+                <a:ea typeface="Amiri" pitchFamily="2" charset="-78"/>
                 <a:cs typeface="Amiri" pitchFamily="2" charset="-78"/>
               </a:rPr>
               <a:t>هَلْ تُشَارِكُ غُرْفَتَكَ مَعَ أَحَدٍ؟</a:t>
@@ -11294,6 +11376,7 @@
                   <a:srgbClr val="1B3B6F"/>
                 </a:solidFill>
                 <a:latin typeface="Amiri" pitchFamily="2" charset="-78"/>
+                <a:ea typeface="Amiri" pitchFamily="2" charset="-78"/>
                 <a:cs typeface="Amiri" pitchFamily="2" charset="-78"/>
               </a:rPr>
               <a:t>آكُلُ كُلَّ شَيْءٍ تَقْرِيبًا، لٰكِنِّي لَا آكُلُ الفُطْرَ، أَمَّا الحَلَوِيَّاتُ فَأُحِبُّهَا جِدًّا!</a:t>
@@ -11370,6 +11453,7 @@
                   <a:srgbClr val="1B3B6F"/>
                 </a:solidFill>
                 <a:latin typeface="Amiri" pitchFamily="2" charset="-78"/>
+                <a:ea typeface="Amiri" pitchFamily="2" charset="-78"/>
                 <a:cs typeface="Amiri" pitchFamily="2" charset="-78"/>
               </a:rPr>
               <a:t>مَاذَا تُحِبُّ أَنْ تَأْكُلَ؟</a:t>
@@ -11473,6 +11557,7 @@
                   <a:srgbClr val="1B3B6F"/>
                 </a:solidFill>
                 <a:latin typeface="Amiri" pitchFamily="2" charset="-78"/>
+                <a:ea typeface="Amiri" pitchFamily="2" charset="-78"/>
                 <a:cs typeface="Amiri" pitchFamily="2" charset="-78"/>
               </a:rPr>
               <a:t>رَائِعٌ! مَا اسْمُهُ؟ وَمَاذَا يُحِبُّ أَنْ يَفْعَلَ فِي وَقْتِ فَرَاغِهِ؟</a:t>
@@ -11549,6 +11634,7 @@
                   <a:srgbClr val="1B3B6F"/>
                 </a:solidFill>
                 <a:latin typeface="Amiri" pitchFamily="2" charset="-78"/>
+                <a:ea typeface="Amiri" pitchFamily="2" charset="-78"/>
                 <a:cs typeface="Amiri" pitchFamily="2" charset="-78"/>
               </a:rPr>
               <a:t>… عِنْدَنَا ابْنٌ فِي عُمْرِكَ.</a:t>
@@ -11652,6 +11738,7 @@
                   <a:srgbClr val="1B3B6F"/>
                 </a:solidFill>
                 <a:latin typeface="Amiri" pitchFamily="2" charset="-78"/>
+                <a:ea typeface="Amiri" pitchFamily="2" charset="-78"/>
                 <a:cs typeface="Amiri" pitchFamily="2" charset="-78"/>
               </a:rPr>
               <a:t>سَأُحْضِرُ لَكُمْ شَايًا إِنْجِلِيزِيًّا وَكَعْكًا اسْكُتْلَنْدِيًّا، لِأَنَّ أُمِّي تَقُولُ إِنَّهُ أَفْضَلُ هَدِيَّةٍ.</a:t>
@@ -11728,6 +11815,7 @@
                   <a:srgbClr val="1B3B6F"/>
                 </a:solidFill>
                 <a:latin typeface="Amiri" pitchFamily="2" charset="-78"/>
+                <a:ea typeface="Amiri" pitchFamily="2" charset="-78"/>
                 <a:cs typeface="Amiri" pitchFamily="2" charset="-78"/>
               </a:rPr>
               <a:t>مَاذَا سَتُحْضِرُ مَعَكَ مِنْ بِرِيطَانِيَا؟</a:t>
@@ -11937,6 +12025,7 @@
                   <a:srgbClr val="D4AF37"/>
                 </a:solidFill>
                 <a:latin typeface="Amiri" pitchFamily="2" charset="-78"/>
+                <a:ea typeface="Amiri" pitchFamily="2" charset="-78"/>
                 <a:cs typeface="Amiri" pitchFamily="2" charset="-78"/>
               </a:rPr>
               <a:t>م</a:t>
@@ -12257,6 +12346,7 @@
                   <a:srgbClr val="8A6D1E"/>
                 </a:solidFill>
                 <a:latin typeface="Amiri" pitchFamily="2" charset="-78"/>
+                <a:ea typeface="Amiri" pitchFamily="2" charset="-78"/>
                 <a:cs typeface="Amiri" pitchFamily="2" charset="-78"/>
               </a:rPr>
               <a:t>نَمُوذَجُ الإِجَابَةِ</a:t>
@@ -12499,6 +12589,7 @@
                   <a:srgbClr val="1B3B6F"/>
                 </a:solidFill>
                 <a:latin typeface="Amiri" pitchFamily="2" charset="-78"/>
+                <a:ea typeface="Amiri" pitchFamily="2" charset="-78"/>
                 <a:cs typeface="Amiri" pitchFamily="2" charset="-78"/>
               </a:rPr>
               <a:t>نَعَمْ، لِأَنَّهَا مُتَنَوِّعَةٌ؛ مَثَلًا فِي شَارِعِنَا وَحْدَهُ جِيرَانٌ مِنْ عَشَرَةِ بُلْدَانٍ.</a:t>
@@ -12575,6 +12666,7 @@
                   <a:srgbClr val="1B3B6F"/>
                 </a:solidFill>
                 <a:latin typeface="Amiri" pitchFamily="2" charset="-78"/>
+                <a:ea typeface="Amiri" pitchFamily="2" charset="-78"/>
                 <a:cs typeface="Amiri" pitchFamily="2" charset="-78"/>
               </a:rPr>
               <a:t>هَلْ تُحِبُّ مَدِينَتَكَ؟</a:t>
@@ -12678,6 +12770,7 @@
                   <a:srgbClr val="1B3B6F"/>
                 </a:solidFill>
                 <a:latin typeface="Amiri" pitchFamily="2" charset="-78"/>
+                <a:ea typeface="Amiri" pitchFamily="2" charset="-78"/>
                 <a:cs typeface="Amiri" pitchFamily="2" charset="-78"/>
               </a:rPr>
               <a:t>كُنْتُ خَجُولًا جِدًّا، أَمَّا الآنَ فَأَتَكَلَّمُ أَمَامَ الصَّفِّ بِثِقَةٍ، لِأَنِّي انْضَمَمْتُ إِلَى نَادِي المُنَاظَرَاتِ.</a:t>
@@ -12754,6 +12847,7 @@
                   <a:srgbClr val="1B3B6F"/>
                 </a:solidFill>
                 <a:latin typeface="Amiri" pitchFamily="2" charset="-78"/>
+                <a:ea typeface="Amiri" pitchFamily="2" charset="-78"/>
                 <a:cs typeface="Amiri" pitchFamily="2" charset="-78"/>
               </a:rPr>
               <a:t>كَيْفَ تَغَيَّرْتَ فِي السَّنَوَاتِ الأَخِيرَةِ؟</a:t>
@@ -12857,6 +12951,7 @@
                   <a:srgbClr val="1B3B6F"/>
                 </a:solidFill>
                 <a:latin typeface="Amiri" pitchFamily="2" charset="-78"/>
+                <a:ea typeface="Amiri" pitchFamily="2" charset="-78"/>
                 <a:cs typeface="Amiri" pitchFamily="2" charset="-78"/>
               </a:rPr>
               <a:t>جَدِّي، لِأَنَّهُ يَفْهَمُنِي أَكْثَرَ مِنْ أَيِّ شَخْصٍ آخَرَ، وَلِذٰلِكَ أَزُورُهُ كُلَّ أُسْبُوعٍ.</a:t>
@@ -12933,6 +13028,7 @@
                   <a:srgbClr val="1B3B6F"/>
                 </a:solidFill>
                 <a:latin typeface="Amiri" pitchFamily="2" charset="-78"/>
+                <a:ea typeface="Amiri" pitchFamily="2" charset="-78"/>
                 <a:cs typeface="Amiri" pitchFamily="2" charset="-78"/>
               </a:rPr>
               <a:t>مَنْ أَهَمُّ شَخْصٍ فِي حَيَاتِكَ؟</a:t>
@@ -13036,6 +13132,7 @@
                   <a:srgbClr val="1B3B6F"/>
                 </a:solidFill>
                 <a:latin typeface="Amiri" pitchFamily="2" charset="-78"/>
+                <a:ea typeface="Amiri" pitchFamily="2" charset="-78"/>
                 <a:cs typeface="Amiri" pitchFamily="2" charset="-78"/>
               </a:rPr>
               <a:t>أَوَّلًا لَعِبْتُ مُبَارَاةً، ثُمَّ زُرْتُ جَدِّي، وَأَخِيرًا شَاهَدْتُ فِيلْمًا مَعَ أُسْرَتِي.</a:t>
@@ -13112,6 +13209,7 @@
                   <a:srgbClr val="1B3B6F"/>
                 </a:solidFill>
                 <a:latin typeface="Amiri" pitchFamily="2" charset="-78"/>
+                <a:ea typeface="Amiri" pitchFamily="2" charset="-78"/>
                 <a:cs typeface="Amiri" pitchFamily="2" charset="-78"/>
               </a:rPr>
               <a:t>مَاذَا فَعَلْتَ فِي نِهَايَةِ الأُسْبُوعِ؟</a:t>
@@ -13215,6 +13313,7 @@
                   <a:srgbClr val="1B3B6F"/>
                 </a:solidFill>
                 <a:latin typeface="Amiri" pitchFamily="2" charset="-78"/>
+                <a:ea typeface="Amiri" pitchFamily="2" charset="-78"/>
                 <a:cs typeface="Amiri" pitchFamily="2" charset="-78"/>
               </a:rPr>
               <a:t>أَتَمَنَّى أَنْ أَدْرُسَ الطِّبَّ، لِأَنِّي أُحِبُّ أَنْ أُسَاعِدَ النَّاسَ، وَلِذٰلِكَ أَدْرُسُ العُلُومَ بِجِدٍّ الآنَ.</a:t>
@@ -13291,6 +13390,7 @@
                   <a:srgbClr val="1B3B6F"/>
                 </a:solidFill>
                 <a:latin typeface="Amiri" pitchFamily="2" charset="-78"/>
+                <a:ea typeface="Amiri" pitchFamily="2" charset="-78"/>
                 <a:cs typeface="Amiri" pitchFamily="2" charset="-78"/>
               </a:rPr>
               <a:t>وَمَا خُطَطُكَ لِلْمُسْتَقْبَلِ؟</a:t>
@@ -13500,6 +13600,7 @@
                   <a:srgbClr val="D4AF37"/>
                 </a:solidFill>
                 <a:latin typeface="Amiri" pitchFamily="2" charset="-78"/>
+                <a:ea typeface="Amiri" pitchFamily="2" charset="-78"/>
                 <a:cs typeface="Amiri" pitchFamily="2" charset="-78"/>
               </a:rPr>
               <a:t>م</a:t>
@@ -13820,6 +13921,7 @@
                   <a:srgbClr val="8A6D1E"/>
                 </a:solidFill>
                 <a:latin typeface="Amiri" pitchFamily="2" charset="-78"/>
+                <a:ea typeface="Amiri" pitchFamily="2" charset="-78"/>
                 <a:cs typeface="Amiri" pitchFamily="2" charset="-78"/>
               </a:rPr>
               <a:t>نَمُوذَجُ الإِجَابَةِ</a:t>
@@ -14062,6 +14164,7 @@
                   <a:srgbClr val="1B3B6F"/>
                 </a:solidFill>
                 <a:latin typeface="Amiri" pitchFamily="2" charset="-78"/>
+                <a:ea typeface="Amiri" pitchFamily="2" charset="-78"/>
                 <a:cs typeface="Amiri" pitchFamily="2" charset="-78"/>
               </a:rPr>
               <a:t>أَعْتَقِدُ أَنَّهُ الضَّغْطُ، لِأَنَّ الامْتِحَانَاتِ كَثِيرَةٌ، بِالإِضَافَةِ إِلَى أَنَّ وَسَائِلَ التَّوَاصُلِ تَجْعَلُنَا نُقَارِنُ أَنْفُسَنَا بِالآخَرِينَ.</a:t>
@@ -14138,6 +14241,7 @@
                   <a:srgbClr val="1B3B6F"/>
                 </a:solidFill>
                 <a:latin typeface="Amiri" pitchFamily="2" charset="-78"/>
+                <a:ea typeface="Amiri" pitchFamily="2" charset="-78"/>
                 <a:cs typeface="Amiri" pitchFamily="2" charset="-78"/>
               </a:rPr>
               <a:t>مَا أَصْعَبُ شَيْءٍ فِي حَيَاةِ الشَّبَابِ اليَوْمَ؟</a:t>
@@ -14241,6 +14345,7 @@
                   <a:srgbClr val="1B3B6F"/>
                 </a:solidFill>
                 <a:latin typeface="Amiri" pitchFamily="2" charset="-78"/>
+                <a:ea typeface="Amiri" pitchFamily="2" charset="-78"/>
                 <a:cs typeface="Amiri" pitchFamily="2" charset="-78"/>
               </a:rPr>
               <a:t>صَحِيحٌ أَنَّهُمْ لَمْ يَعْرِفُوا ضَغْطَ الإِنْتَرْنِتِ، غَيْرَ أَنَّ حَيَاتَهُمْ كَانَتْ أَصْعَبَ مَادِّيًّا، فَأَبِي كَانَ يَعْمَلُ وَهُوَ طَالِبٌ.</a:t>
@@ -14317,6 +14422,7 @@
                   <a:srgbClr val="1B3B6F"/>
                 </a:solidFill>
                 <a:latin typeface="Amiri" pitchFamily="2" charset="-78"/>
+                <a:ea typeface="Amiri" pitchFamily="2" charset="-78"/>
                 <a:cs typeface="Amiri" pitchFamily="2" charset="-78"/>
               </a:rPr>
               <a:t>هَلْ كَانَتْ حَيَاةُ وَالِدَيْكَ أَسْهَلَ؟</a:t>
@@ -14420,6 +14526,7 @@
                   <a:srgbClr val="1B3B6F"/>
                 </a:solidFill>
                 <a:latin typeface="Amiri" pitchFamily="2" charset="-78"/>
+                <a:ea typeface="Amiri" pitchFamily="2" charset="-78"/>
                 <a:cs typeface="Amiri" pitchFamily="2" charset="-78"/>
               </a:rPr>
               <a:t>فِي أُسْرَتِي مَثَلًا نَأْكُلُ العَشَاءَ مَعًا بِلَا هَوَاتِفَ، فَأَسْتَطِيعُ أَنْ أَتَحَدَّثَ عَنْ مَشَاكِلِي بِحُرِّيَّةٍ.</a:t>
@@ -14496,6 +14603,7 @@
                   <a:srgbClr val="1B3B6F"/>
                 </a:solidFill>
                 <a:latin typeface="Amiri" pitchFamily="2" charset="-78"/>
+                <a:ea typeface="Amiri" pitchFamily="2" charset="-78"/>
                 <a:cs typeface="Amiri" pitchFamily="2" charset="-78"/>
               </a:rPr>
               <a:t>مَا دَوْرُ الأُسْرَةِ فِي مُسَاعَدَةِ الشَّبَابِ؟</a:t>
@@ -14599,6 +14707,7 @@
                   <a:srgbClr val="1B3B6F"/>
                 </a:solidFill>
                 <a:latin typeface="Amiri" pitchFamily="2" charset="-78"/>
+                <a:ea typeface="Amiri" pitchFamily="2" charset="-78"/>
                 <a:cs typeface="Amiri" pitchFamily="2" charset="-78"/>
               </a:rPr>
               <a:t>عِنْدَمَا رَسَبْتُ فِي امْتِحَانِ السِّبَاحَةِ أَوَّلَ مَرَّةٍ، تَعَلَّمْتُ أَنَّ الفَشَلَ لَيْسَ النِّهَايَةَ، بَلْ بِدَايَةُ التَّحَسُّنِ.</a:t>
@@ -14675,6 +14784,7 @@
                   <a:srgbClr val="1B3B6F"/>
                 </a:solidFill>
                 <a:latin typeface="Amiri" pitchFamily="2" charset="-78"/>
+                <a:ea typeface="Amiri" pitchFamily="2" charset="-78"/>
                 <a:cs typeface="Amiri" pitchFamily="2" charset="-78"/>
               </a:rPr>
               <a:t>مَا الَّذِي تَعَلَّمْتَهُ مِنْ تَجْرِبَةٍ صَعْبَةٍ؟</a:t>
@@ -14778,6 +14888,7 @@
                   <a:srgbClr val="1B3B6F"/>
                 </a:solidFill>
                 <a:latin typeface="Amiri" pitchFamily="2" charset="-78"/>
+                <a:ea typeface="Amiri" pitchFamily="2" charset="-78"/>
                 <a:cs typeface="Amiri" pitchFamily="2" charset="-78"/>
               </a:rPr>
               <a:t>لَوْ كَتَبْتُ رِسَالَةً لِنَفْسِي، لَقُلْتُ لَهَا: لَا تَنْسَ أُسْرَتَكَ، وَلَا تَتْرُكْ هِوَايَاتِكَ مَهْمَا انْشَغَلْتَ.</a:t>
@@ -14854,6 +14965,7 @@
                   <a:srgbClr val="1B3B6F"/>
                 </a:solidFill>
                 <a:latin typeface="Amiri" pitchFamily="2" charset="-78"/>
+                <a:ea typeface="Amiri" pitchFamily="2" charset="-78"/>
                 <a:cs typeface="Amiri" pitchFamily="2" charset="-78"/>
               </a:rPr>
               <a:t>لَوْ كَتَبْتَ رِسَالَةً لِنَفْسِكَ بَعْدَ عَشْرِ سَنَوَاتٍ، مَاذَا تَقُولُ؟</a:t>
@@ -15063,6 +15175,7 @@
                   <a:srgbClr val="D4AF37"/>
                 </a:solidFill>
                 <a:latin typeface="Amiri" pitchFamily="2" charset="-78"/>
+                <a:ea typeface="Amiri" pitchFamily="2" charset="-78"/>
                 <a:cs typeface="Amiri" pitchFamily="2" charset="-78"/>
               </a:rPr>
               <a:t>م</a:t>
@@ -15383,6 +15496,7 @@
                   <a:srgbClr val="8A6D1E"/>
                 </a:solidFill>
                 <a:latin typeface="Amiri" pitchFamily="2" charset="-78"/>
+                <a:ea typeface="Amiri" pitchFamily="2" charset="-78"/>
                 <a:cs typeface="Amiri" pitchFamily="2" charset="-78"/>
               </a:rPr>
               <a:t>أَنَا</a:t>
@@ -15663,6 +15777,7 @@
                   <a:srgbClr val="1B3B6F"/>
                 </a:solidFill>
                 <a:latin typeface="Amiri" pitchFamily="2" charset="-78"/>
+                <a:ea typeface="Amiri" pitchFamily="2" charset="-78"/>
                 <a:cs typeface="Amiri" pitchFamily="2" charset="-78"/>
               </a:rPr>
               <a:t>أَنَا … وَشَعْرِي …</a:t>
@@ -15739,6 +15854,7 @@
                   <a:srgbClr val="1B3B6F"/>
                 </a:solidFill>
                 <a:latin typeface="Amiri" pitchFamily="2" charset="-78"/>
+                <a:ea typeface="Amiri" pitchFamily="2" charset="-78"/>
                 <a:cs typeface="Amiri" pitchFamily="2" charset="-78"/>
               </a:rPr>
               <a:t>صِفْ نَفْسَكَ.</a:t>
@@ -15907,6 +16023,7 @@
                   <a:srgbClr val="1B3B6F"/>
                 </a:solidFill>
                 <a:latin typeface="Amiri" pitchFamily="2" charset="-78"/>
+                <a:ea typeface="Amiri" pitchFamily="2" charset="-78"/>
                 <a:cs typeface="Amiri" pitchFamily="2" charset="-78"/>
               </a:rPr>
               <a:t>صَدِيقَتِي المُفَضَّلَةُ …</a:t>
@@ -15983,6 +16100,7 @@
                   <a:srgbClr val="1B3B6F"/>
                 </a:solidFill>
                 <a:latin typeface="Amiri" pitchFamily="2" charset="-78"/>
+                <a:ea typeface="Amiri" pitchFamily="2" charset="-78"/>
                 <a:cs typeface="Amiri" pitchFamily="2" charset="-78"/>
               </a:rPr>
               <a:t>مَنْ صَدِيقُكَ المُفَضَّلُ؟</a:t>
@@ -16151,6 +16269,7 @@
                   <a:srgbClr val="1B3B6F"/>
                 </a:solidFill>
                 <a:latin typeface="Amiri" pitchFamily="2" charset="-78"/>
+                <a:ea typeface="Amiri" pitchFamily="2" charset="-78"/>
                 <a:cs typeface="Amiri" pitchFamily="2" charset="-78"/>
               </a:rPr>
               <a:t>غُرْفَتِي … فِيهَا …</a:t>
@@ -16227,6 +16346,7 @@
                   <a:srgbClr val="1B3B6F"/>
                 </a:solidFill>
                 <a:latin typeface="Amiri" pitchFamily="2" charset="-78"/>
+                <a:ea typeface="Amiri" pitchFamily="2" charset="-78"/>
                 <a:cs typeface="Amiri" pitchFamily="2" charset="-78"/>
               </a:rPr>
               <a:t>صِفْ غُرْفَتَكَ.</a:t>
@@ -16395,6 +16515,7 @@
                   <a:srgbClr val="1B3B6F"/>
                 </a:solidFill>
                 <a:latin typeface="Amiri" pitchFamily="2" charset="-78"/>
+                <a:ea typeface="Amiri" pitchFamily="2" charset="-78"/>
                 <a:cs typeface="Amiri" pitchFamily="2" charset="-78"/>
               </a:rPr>
               <a:t>أَلْبَسُ …</a:t>
@@ -16471,6 +16592,7 @@
                   <a:srgbClr val="1B3B6F"/>
                 </a:solidFill>
                 <a:latin typeface="Amiri" pitchFamily="2" charset="-78"/>
+                <a:ea typeface="Amiri" pitchFamily="2" charset="-78"/>
                 <a:cs typeface="Amiri" pitchFamily="2" charset="-78"/>
               </a:rPr>
               <a:t>مَاذَا تَلْبَسِينَ فِي العِيدِ؟</a:t>
@@ -16639,6 +16761,7 @@
                   <a:srgbClr val="1B3B6F"/>
                 </a:solidFill>
                 <a:latin typeface="Amiri" pitchFamily="2" charset="-78"/>
+                <a:ea typeface="Amiri" pitchFamily="2" charset="-78"/>
                 <a:cs typeface="Amiri" pitchFamily="2" charset="-78"/>
               </a:rPr>
               <a:t>أَقْرَأُ … / أَلْعَبُ …</a:t>
@@ -16715,6 +16838,7 @@
                   <a:srgbClr val="1B3B6F"/>
                 </a:solidFill>
                 <a:latin typeface="Amiri" pitchFamily="2" charset="-78"/>
+                <a:ea typeface="Amiri" pitchFamily="2" charset="-78"/>
                 <a:cs typeface="Amiri" pitchFamily="2" charset="-78"/>
               </a:rPr>
               <a:t>مَاذَا تَفْعَلِينَ فِي وَقْتِ فَرَاغِكِ؟</a:t>
@@ -16869,6 +16993,7 @@
                   <a:srgbClr val="1B3B6F"/>
                 </a:solidFill>
                 <a:latin typeface="Amiri" pitchFamily="2" charset="-78"/>
+                <a:ea typeface="Amiri" pitchFamily="2" charset="-78"/>
                 <a:cs typeface="Amiri" pitchFamily="2" charset="-78"/>
               </a:rPr>
               <a:t>عَفْوًا، هَلْ يُمْكِنُ أَنْ تُعِيدَ السُّؤَالَ؟</a:t>
@@ -17002,6 +17127,7 @@
                   <a:srgbClr val="D4AF37"/>
                 </a:solidFill>
                 <a:latin typeface="Amiri" pitchFamily="2" charset="-78"/>
+                <a:ea typeface="Amiri" pitchFamily="2" charset="-78"/>
                 <a:cs typeface="Amiri" pitchFamily="2" charset="-78"/>
               </a:rPr>
               <a:t>م</a:t>
@@ -17322,6 +17448,7 @@
                   <a:srgbClr val="8A6D1E"/>
                 </a:solidFill>
                 <a:latin typeface="Amiri" pitchFamily="2" charset="-78"/>
+                <a:ea typeface="Amiri" pitchFamily="2" charset="-78"/>
                 <a:cs typeface="Amiri" pitchFamily="2" charset="-78"/>
               </a:rPr>
               <a:t>حَيَاتِي</a:t>
@@ -17602,6 +17729,7 @@
                   <a:srgbClr val="1B3B6F"/>
                 </a:solidFill>
                 <a:latin typeface="Amiri" pitchFamily="2" charset="-78"/>
+                <a:ea typeface="Amiri" pitchFamily="2" charset="-78"/>
                 <a:cs typeface="Amiri" pitchFamily="2" charset="-78"/>
               </a:rPr>
               <a:t>تَعَرَّفْتُ عَلَيْهِ عِنْدَمَا … وَمُنْذُ ذٰلِكَ …</a:t>
@@ -17678,6 +17806,7 @@
                   <a:srgbClr val="1B3B6F"/>
                 </a:solidFill>
                 <a:latin typeface="Amiri" pitchFamily="2" charset="-78"/>
+                <a:ea typeface="Amiri" pitchFamily="2" charset="-78"/>
                 <a:cs typeface="Amiri" pitchFamily="2" charset="-78"/>
               </a:rPr>
               <a:t>كَيْفَ تَعَرَّفْتَ عَلَى صَدِيقِكَ المُفَضَّلِ؟</a:t>
@@ -17781,6 +17910,7 @@
                   <a:srgbClr val="1B3B6F"/>
                 </a:solidFill>
                 <a:latin typeface="Amiri" pitchFamily="2" charset="-78"/>
+                <a:ea typeface="Amiri" pitchFamily="2" charset="-78"/>
                 <a:cs typeface="Amiri" pitchFamily="2" charset="-78"/>
               </a:rPr>
               <a:t>أُشْبِهُ … فِي … أَمَّا شَخْصِيَّتِي فَتُشْبِهُ …</a:t>
@@ -17857,6 +17987,7 @@
                   <a:srgbClr val="1B3B6F"/>
                 </a:solidFill>
                 <a:latin typeface="Amiri" pitchFamily="2" charset="-78"/>
+                <a:ea typeface="Amiri" pitchFamily="2" charset="-78"/>
                 <a:cs typeface="Amiri" pitchFamily="2" charset="-78"/>
               </a:rPr>
               <a:t>هَلْ تُشْبِهُ أَحَدًا فِي أُسْرَتِكَ؟</a:t>
@@ -17960,6 +18091,7 @@
                   <a:srgbClr val="1B3B6F"/>
                 </a:solidFill>
                 <a:latin typeface="Amiri" pitchFamily="2" charset="-78"/>
+                <a:ea typeface="Amiri" pitchFamily="2" charset="-78"/>
                 <a:cs typeface="Amiri" pitchFamily="2" charset="-78"/>
               </a:rPr>
               <a:t>أُرِيدُ أَنْ … لِأَنَّ … لِذٰلِكَ …</a:t>
@@ -18036,6 +18168,7 @@
                   <a:srgbClr val="1B3B6F"/>
                 </a:solidFill>
                 <a:latin typeface="Amiri" pitchFamily="2" charset="-78"/>
+                <a:ea typeface="Amiri" pitchFamily="2" charset="-78"/>
                 <a:cs typeface="Amiri" pitchFamily="2" charset="-78"/>
               </a:rPr>
               <a:t>مَا الَّذِي تُرِيدُ أَنْ تُغَيِّرَهُ فِي بَيْتِكَ؟</a:t>
@@ -18139,6 +18272,7 @@
                   <a:srgbClr val="1B3B6F"/>
                 </a:solidFill>
                 <a:latin typeface="Amiri" pitchFamily="2" charset="-78"/>
+                <a:ea typeface="Amiri" pitchFamily="2" charset="-78"/>
                 <a:cs typeface="Amiri" pitchFamily="2" charset="-78"/>
               </a:rPr>
               <a:t>أَجْمَلُ هَدِيَّةٍ … كَانَتْ … لِأَنَّ …</a:t>
@@ -18215,6 +18349,7 @@
                   <a:srgbClr val="1B3B6F"/>
                 </a:solidFill>
                 <a:latin typeface="Amiri" pitchFamily="2" charset="-78"/>
+                <a:ea typeface="Amiri" pitchFamily="2" charset="-78"/>
                 <a:cs typeface="Amiri" pitchFamily="2" charset="-78"/>
               </a:rPr>
               <a:t>صِفْ أَجْمَلَ هَدِيَّةٍ أَخَذْتَهَا.</a:t>
@@ -18318,6 +18453,7 @@
                   <a:srgbClr val="1B3B6F"/>
                 </a:solidFill>
                 <a:latin typeface="Amiri" pitchFamily="2" charset="-78"/>
+                <a:ea typeface="Amiri" pitchFamily="2" charset="-78"/>
                 <a:cs typeface="Amiri" pitchFamily="2" charset="-78"/>
               </a:rPr>
               <a:t>أَوَّلًا سَأُرَاجِعُ … ثُمَّ … بِالإِضَافَةِ إِلَى ذٰلِكَ …</a:t>
@@ -18394,6 +18530,7 @@
                   <a:srgbClr val="1B3B6F"/>
                 </a:solidFill>
                 <a:latin typeface="Amiri" pitchFamily="2" charset="-78"/>
+                <a:ea typeface="Amiri" pitchFamily="2" charset="-78"/>
                 <a:cs typeface="Amiri" pitchFamily="2" charset="-78"/>
               </a:rPr>
               <a:t>كَيْفَ سَتَقْضِي العُطْلَةَ القَادِمَةَ؟</a:t>
@@ -18603,6 +18740,7 @@
                   <a:srgbClr val="D4AF37"/>
                 </a:solidFill>
                 <a:latin typeface="Amiri" pitchFamily="2" charset="-78"/>
+                <a:ea typeface="Amiri" pitchFamily="2" charset="-78"/>
                 <a:cs typeface="Amiri" pitchFamily="2" charset="-78"/>
               </a:rPr>
               <a:t>م</a:t>
@@ -18923,6 +19061,7 @@
                   <a:srgbClr val="8A6D1E"/>
                 </a:solidFill>
                 <a:latin typeface="Amiri" pitchFamily="2" charset="-78"/>
+                <a:ea typeface="Amiri" pitchFamily="2" charset="-78"/>
                 <a:cs typeface="Amiri" pitchFamily="2" charset="-78"/>
               </a:rPr>
               <a:t>الشَّبَابُ وَالحَيَاةُ</a:t>
@@ -19203,6 +19342,7 @@
                   <a:srgbClr val="1B3B6F"/>
                 </a:solidFill>
                 <a:latin typeface="Amiri" pitchFamily="2" charset="-78"/>
+                <a:ea typeface="Amiri" pitchFamily="2" charset="-78"/>
                 <a:cs typeface="Amiri" pitchFamily="2" charset="-78"/>
               </a:rPr>
               <a:t>صَحِيحٌ أَنَّ … غَيْرَ أَنَّ …</a:t>
@@ -19279,6 +19419,7 @@
                   <a:srgbClr val="1B3B6F"/>
                 </a:solidFill>
                 <a:latin typeface="Amiri" pitchFamily="2" charset="-78"/>
+                <a:ea typeface="Amiri" pitchFamily="2" charset="-78"/>
                 <a:cs typeface="Amiri" pitchFamily="2" charset="-78"/>
               </a:rPr>
               <a:t>هَلِ الأَصْدِقَاءُ أَهَمُّ مِنَ الأُسْرَةِ فِي سِنِّكَ؟</a:t>
@@ -19382,6 +19523,7 @@
                   <a:srgbClr val="1B3B6F"/>
                 </a:solidFill>
                 <a:latin typeface="Amiri" pitchFamily="2" charset="-78"/>
+                <a:ea typeface="Amiri" pitchFamily="2" charset="-78"/>
                 <a:cs typeface="Amiri" pitchFamily="2" charset="-78"/>
               </a:rPr>
               <a:t>إِلَى حَدٍّ مَا؛ فَمَثَلًا …</a:t>
@@ -19458,6 +19600,7 @@
                   <a:srgbClr val="1B3B6F"/>
                 </a:solidFill>
                 <a:latin typeface="Amiri" pitchFamily="2" charset="-78"/>
+                <a:ea typeface="Amiri" pitchFamily="2" charset="-78"/>
                 <a:cs typeface="Amiri" pitchFamily="2" charset="-78"/>
               </a:rPr>
               <a:t>هَلْ تُعَبِّرُ مَلَابِسُنَا وَغُرَفُنَا عَنْ هُوِيَّتِنَا؟</a:t>
@@ -19561,6 +19704,7 @@
                   <a:srgbClr val="1B3B6F"/>
                 </a:solidFill>
                 <a:latin typeface="Amiri" pitchFamily="2" charset="-78"/>
+                <a:ea typeface="Amiri" pitchFamily="2" charset="-78"/>
                 <a:cs typeface="Amiri" pitchFamily="2" charset="-78"/>
               </a:rPr>
               <a:t>كَانَ وَالِدَايَ … أَمَّا جِيلُنَا فَيَصْنَعُ …</a:t>
@@ -19637,6 +19781,7 @@
                   <a:srgbClr val="1B3B6F"/>
                 </a:solidFill>
                 <a:latin typeface="Amiri" pitchFamily="2" charset="-78"/>
+                <a:ea typeface="Amiri" pitchFamily="2" charset="-78"/>
                 <a:cs typeface="Amiri" pitchFamily="2" charset="-78"/>
               </a:rPr>
               <a:t>كَيْفَ تَخْتَلِفُ هِوَايَاتُ جِيلِكَ عَنْ هِوَايَاتِ جِيلِ وَالِدَيْكَ؟</a:t>
@@ -19740,6 +19885,7 @@
                   <a:srgbClr val="1B3B6F"/>
                 </a:solidFill>
                 <a:latin typeface="Amiri" pitchFamily="2" charset="-78"/>
+                <a:ea typeface="Amiri" pitchFamily="2" charset="-78"/>
                 <a:cs typeface="Amiri" pitchFamily="2" charset="-78"/>
               </a:rPr>
               <a:t>عِنْدَمَا … تَغَيَّرْتُ، فَأَصْبَحْتُ …</a:t>
@@ -19816,6 +19962,7 @@
                   <a:srgbClr val="1B3B6F"/>
                 </a:solidFill>
                 <a:latin typeface="Amiri" pitchFamily="2" charset="-78"/>
+                <a:ea typeface="Amiri" pitchFamily="2" charset="-78"/>
                 <a:cs typeface="Amiri" pitchFamily="2" charset="-78"/>
               </a:rPr>
               <a:t>مَا التَّجْرِبَةُ الَّتِي غَيَّرَتْ شَخْصِيَّتَكَ؟</a:t>
@@ -19919,6 +20066,7 @@
                   <a:srgbClr val="1B3B6F"/>
                 </a:solidFill>
                 <a:latin typeface="Amiri" pitchFamily="2" charset="-78"/>
+                <a:ea typeface="Amiri" pitchFamily="2" charset="-78"/>
                 <a:cs typeface="Amiri" pitchFamily="2" charset="-78"/>
               </a:rPr>
               <a:t>لَوِ اسْتَطَعْتُ …، لَاخْتَرْتُ … لِكَيْ …</a:t>
@@ -19995,6 +20143,7 @@
                   <a:srgbClr val="1B3B6F"/>
                 </a:solidFill>
                 <a:latin typeface="Amiri" pitchFamily="2" charset="-78"/>
+                <a:ea typeface="Amiri" pitchFamily="2" charset="-78"/>
                 <a:cs typeface="Amiri" pitchFamily="2" charset="-78"/>
               </a:rPr>
               <a:t>لَوِ اسْتَطَعْتَ أَنْ تَعِيشَ يَوْمًا فِي حَيَاةِ شَخْصٍ آخَرَ، مَنْ تَخْتَارُ؟</a:t>
@@ -20204,6 +20353,7 @@
                   <a:srgbClr val="D4AF37"/>
                 </a:solidFill>
                 <a:latin typeface="Amiri" pitchFamily="2" charset="-78"/>
+                <a:ea typeface="Amiri" pitchFamily="2" charset="-78"/>
                 <a:cs typeface="Amiri" pitchFamily="2" charset="-78"/>
               </a:rPr>
               <a:t>م</a:t>
@@ -20524,6 +20674,7 @@
                   <a:srgbClr val="8A6D1E"/>
                 </a:solidFill>
                 <a:latin typeface="Amiri" pitchFamily="2" charset="-78"/>
+                <a:ea typeface="Amiri" pitchFamily="2" charset="-78"/>
                 <a:cs typeface="Amiri" pitchFamily="2" charset="-78"/>
               </a:rPr>
               <a:t>آدَابُ الصَّفِّ</a:t>
@@ -22055,6 +22206,7 @@
                   <a:srgbClr val="D4AF37"/>
                 </a:solidFill>
                 <a:latin typeface="Amiri" pitchFamily="2" charset="-78"/>
+                <a:ea typeface="Amiri" pitchFamily="2" charset="-78"/>
                 <a:cs typeface="Amiri" pitchFamily="2" charset="-78"/>
               </a:rPr>
               <a:t>م</a:t>
@@ -22375,6 +22527,7 @@
                   <a:srgbClr val="8A6D1E"/>
                 </a:solidFill>
                 <a:latin typeface="Amiri" pitchFamily="2" charset="-78"/>
+                <a:ea typeface="Amiri" pitchFamily="2" charset="-78"/>
                 <a:cs typeface="Amiri" pitchFamily="2" charset="-78"/>
               </a:rPr>
               <a:t>نَمُوذَجُ الإِجَابَةِ</a:t>
@@ -22617,6 +22770,7 @@
                   <a:srgbClr val="1B3B6F"/>
                 </a:solidFill>
                 <a:latin typeface="Amiri" pitchFamily="2" charset="-78"/>
+                <a:ea typeface="Amiri" pitchFamily="2" charset="-78"/>
                 <a:cs typeface="Amiri" pitchFamily="2" charset="-78"/>
               </a:rPr>
               <a:t>أَنَا طَوِيلَةٌ، وَشَعْرِي أَسْوَدُ، وَأَنَا مَرِحَةٌ وَنَشِيطَةٌ.</a:t>
@@ -22693,6 +22847,7 @@
                   <a:srgbClr val="1B3B6F"/>
                 </a:solidFill>
                 <a:latin typeface="Amiri" pitchFamily="2" charset="-78"/>
+                <a:ea typeface="Amiri" pitchFamily="2" charset="-78"/>
                 <a:cs typeface="Amiri" pitchFamily="2" charset="-78"/>
               </a:rPr>
               <a:t>صِفْ نَفْسَكَ.</a:t>
@@ -22796,6 +22951,7 @@
                   <a:srgbClr val="1B3B6F"/>
                 </a:solidFill>
                 <a:latin typeface="Amiri" pitchFamily="2" charset="-78"/>
+                <a:ea typeface="Amiri" pitchFamily="2" charset="-78"/>
                 <a:cs typeface="Amiri" pitchFamily="2" charset="-78"/>
               </a:rPr>
               <a:t>صَدِيقَتِي المُفَضَّلَةُ اسْمُهَا هِبَةُ، وَهِيَ فِي صَفِّي.</a:t>
@@ -22872,6 +23028,7 @@
                   <a:srgbClr val="1B3B6F"/>
                 </a:solidFill>
                 <a:latin typeface="Amiri" pitchFamily="2" charset="-78"/>
+                <a:ea typeface="Amiri" pitchFamily="2" charset="-78"/>
                 <a:cs typeface="Amiri" pitchFamily="2" charset="-78"/>
               </a:rPr>
               <a:t>مَنْ صَدِيقُكَ المُفَضَّلُ؟</a:t>
@@ -22975,6 +23132,7 @@
                   <a:srgbClr val="1B3B6F"/>
                 </a:solidFill>
                 <a:latin typeface="Amiri" pitchFamily="2" charset="-78"/>
+                <a:ea typeface="Amiri" pitchFamily="2" charset="-78"/>
                 <a:cs typeface="Amiri" pitchFamily="2" charset="-78"/>
               </a:rPr>
               <a:t>غُرْفَتِي صَغِيرَةٌ وَوَرْدِيَّةٌ، فِيهَا سَرِيرٌ وَمَكْتَبٌ.</a:t>
@@ -23051,6 +23209,7 @@
                   <a:srgbClr val="1B3B6F"/>
                 </a:solidFill>
                 <a:latin typeface="Amiri" pitchFamily="2" charset="-78"/>
+                <a:ea typeface="Amiri" pitchFamily="2" charset="-78"/>
                 <a:cs typeface="Amiri" pitchFamily="2" charset="-78"/>
               </a:rPr>
               <a:t>صِفْ غُرْفَتَكَ.</a:t>
@@ -23154,6 +23313,7 @@
                   <a:srgbClr val="1B3B6F"/>
                 </a:solidFill>
                 <a:latin typeface="Amiri" pitchFamily="2" charset="-78"/>
+                <a:ea typeface="Amiri" pitchFamily="2" charset="-78"/>
                 <a:cs typeface="Amiri" pitchFamily="2" charset="-78"/>
               </a:rPr>
               <a:t>أَلْبَسُ فُسْتَانًا جَدِيدًا أَخْضَرَ.</a:t>
@@ -23230,6 +23390,7 @@
                   <a:srgbClr val="1B3B6F"/>
                 </a:solidFill>
                 <a:latin typeface="Amiri" pitchFamily="2" charset="-78"/>
+                <a:ea typeface="Amiri" pitchFamily="2" charset="-78"/>
                 <a:cs typeface="Amiri" pitchFamily="2" charset="-78"/>
               </a:rPr>
               <a:t>مَاذَا تَلْبَسِينَ فِي العِيدِ؟</a:t>
@@ -23333,6 +23494,7 @@
                   <a:srgbClr val="1B3B6F"/>
                 </a:solidFill>
                 <a:latin typeface="Amiri" pitchFamily="2" charset="-78"/>
+                <a:ea typeface="Amiri" pitchFamily="2" charset="-78"/>
                 <a:cs typeface="Amiri" pitchFamily="2" charset="-78"/>
               </a:rPr>
               <a:t>أَقْرَأُ الرِّوَايَاتِ، وَأَلْعَبُ كُرَةَ الطَّائِرَةِ يَوْمَ السَّبْتِ.</a:t>
@@ -23409,6 +23571,7 @@
                   <a:srgbClr val="1B3B6F"/>
                 </a:solidFill>
                 <a:latin typeface="Amiri" pitchFamily="2" charset="-78"/>
+                <a:ea typeface="Amiri" pitchFamily="2" charset="-78"/>
                 <a:cs typeface="Amiri" pitchFamily="2" charset="-78"/>
               </a:rPr>
               <a:t>مَاذَا تَفْعَلِينَ فِي وَقْتِ فَرَاغِكِ؟</a:t>
@@ -23618,6 +23781,7 @@
                   <a:srgbClr val="D4AF37"/>
                 </a:solidFill>
                 <a:latin typeface="Amiri" pitchFamily="2" charset="-78"/>
+                <a:ea typeface="Amiri" pitchFamily="2" charset="-78"/>
                 <a:cs typeface="Amiri" pitchFamily="2" charset="-78"/>
               </a:rPr>
               <a:t>م</a:t>
@@ -23938,6 +24102,7 @@
                   <a:srgbClr val="8A6D1E"/>
                 </a:solidFill>
                 <a:latin typeface="Amiri" pitchFamily="2" charset="-78"/>
+                <a:ea typeface="Amiri" pitchFamily="2" charset="-78"/>
                 <a:cs typeface="Amiri" pitchFamily="2" charset="-78"/>
               </a:rPr>
               <a:t>نَمُوذَجُ الإِجَابَةِ</a:t>
@@ -24180,6 +24345,7 @@
                   <a:srgbClr val="1B3B6F"/>
                 </a:solidFill>
                 <a:latin typeface="Amiri" pitchFamily="2" charset="-78"/>
+                <a:ea typeface="Amiri" pitchFamily="2" charset="-78"/>
                 <a:cs typeface="Amiri" pitchFamily="2" charset="-78"/>
               </a:rPr>
               <a:t>تَعَرَّفْتُ عَلَيْهِ عِنْدَمَا جَلَسْنَا مَعًا فِي الصَّفِّ الأَوَّلِ، وَمُنْذُ ذٰلِكَ اليَوْمِ لَا نَفْتَرِقُ.</a:t>
@@ -24256,6 +24422,7 @@
                   <a:srgbClr val="1B3B6F"/>
                 </a:solidFill>
                 <a:latin typeface="Amiri" pitchFamily="2" charset="-78"/>
+                <a:ea typeface="Amiri" pitchFamily="2" charset="-78"/>
                 <a:cs typeface="Amiri" pitchFamily="2" charset="-78"/>
               </a:rPr>
               <a:t>كَيْفَ تَعَرَّفْتَ عَلَى صَدِيقِكَ المُفَضَّلِ؟</a:t>
@@ -24359,6 +24526,7 @@
                   <a:srgbClr val="1B3B6F"/>
                 </a:solidFill>
                 <a:latin typeface="Amiri" pitchFamily="2" charset="-78"/>
+                <a:ea typeface="Amiri" pitchFamily="2" charset="-78"/>
                 <a:cs typeface="Amiri" pitchFamily="2" charset="-78"/>
               </a:rPr>
               <a:t>أُشْبِهُ أُمِّي فِي شَكْلِي، أَمَّا شَخْصِيَّتِي فَتُشْبِهُ شَخْصِيَّةَ أَبِي، لِأَنِّي هَادِئٌ مِثْلَهُ.</a:t>
@@ -24435,6 +24603,7 @@
                   <a:srgbClr val="1B3B6F"/>
                 </a:solidFill>
                 <a:latin typeface="Amiri" pitchFamily="2" charset="-78"/>
+                <a:ea typeface="Amiri" pitchFamily="2" charset="-78"/>
                 <a:cs typeface="Amiri" pitchFamily="2" charset="-78"/>
               </a:rPr>
               <a:t>هَلْ تُشْبِهُ أَحَدًا فِي أُسْرَتِكَ؟</a:t>
@@ -24538,6 +24707,7 @@
                   <a:srgbClr val="1B3B6F"/>
                 </a:solidFill>
                 <a:latin typeface="Amiri" pitchFamily="2" charset="-78"/>
+                <a:ea typeface="Amiri" pitchFamily="2" charset="-78"/>
                 <a:cs typeface="Amiri" pitchFamily="2" charset="-78"/>
               </a:rPr>
               <a:t>أُرِيدُ غُرْفَةً خَاصَّةً بِي، لِأَنِّي أَدْرُسُ لِلِامْتِحَانَاتِ، وَأَخِي يُحِبُّ المُوسِيقَى الصَّاخِبَةَ!</a:t>
@@ -24614,6 +24784,7 @@
                   <a:srgbClr val="1B3B6F"/>
                 </a:solidFill>
                 <a:latin typeface="Amiri" pitchFamily="2" charset="-78"/>
+                <a:ea typeface="Amiri" pitchFamily="2" charset="-78"/>
                 <a:cs typeface="Amiri" pitchFamily="2" charset="-78"/>
               </a:rPr>
               <a:t>مَا الَّذِي تُرِيدُ أَنْ تُغَيِّرَهُ فِي بَيْتِكَ؟</a:t>
@@ -24717,6 +24888,7 @@
                   <a:srgbClr val="1B3B6F"/>
                 </a:solidFill>
                 <a:latin typeface="Amiri" pitchFamily="2" charset="-78"/>
+                <a:ea typeface="Amiri" pitchFamily="2" charset="-78"/>
                 <a:cs typeface="Amiri" pitchFamily="2" charset="-78"/>
               </a:rPr>
               <a:t>أَجْمَلُ هَدِيَّةٍ كَانَتْ دَرَّاجَةً حَمْرَاءَ مِنْ جَدِّي، لِأَنَّهُ اشْتَرَاهَا بِمَالٍ وَفَّرَهُ شُهُورًا.</a:t>
@@ -24793,6 +24965,7 @@
                   <a:srgbClr val="1B3B6F"/>
                 </a:solidFill>
                 <a:latin typeface="Amiri" pitchFamily="2" charset="-78"/>
+                <a:ea typeface="Amiri" pitchFamily="2" charset="-78"/>
                 <a:cs typeface="Amiri" pitchFamily="2" charset="-78"/>
               </a:rPr>
               <a:t>صِفْ أَجْمَلَ هَدِيَّةٍ أَخَذْتَهَا.</a:t>
@@ -24896,6 +25069,7 @@
                   <a:srgbClr val="1B3B6F"/>
                 </a:solidFill>
                 <a:latin typeface="Amiri" pitchFamily="2" charset="-78"/>
+                <a:ea typeface="Amiri" pitchFamily="2" charset="-78"/>
                 <a:cs typeface="Amiri" pitchFamily="2" charset="-78"/>
               </a:rPr>
               <a:t>أَوَّلًا سَأُرَاجِعُ دُرُوسِي، ثُمَّ سَنَزُورُ خَالَتِي، وَبِالإِضَافَةِ إِلَى ذٰلِكَ سَأَبْدَأُ دَرْسَ طَبْخٍ.</a:t>
@@ -24972,6 +25146,7 @@
                   <a:srgbClr val="1B3B6F"/>
                 </a:solidFill>
                 <a:latin typeface="Amiri" pitchFamily="2" charset="-78"/>
+                <a:ea typeface="Amiri" pitchFamily="2" charset="-78"/>
                 <a:cs typeface="Amiri" pitchFamily="2" charset="-78"/>
               </a:rPr>
               <a:t>كَيْفَ سَتَقْضِي العُطْلَةَ القَادِمَةَ؟</a:t>
@@ -25181,6 +25356,7 @@
                   <a:srgbClr val="D4AF37"/>
                 </a:solidFill>
                 <a:latin typeface="Amiri" pitchFamily="2" charset="-78"/>
+                <a:ea typeface="Amiri" pitchFamily="2" charset="-78"/>
                 <a:cs typeface="Amiri" pitchFamily="2" charset="-78"/>
               </a:rPr>
               <a:t>م</a:t>
@@ -25501,6 +25677,7 @@
                   <a:srgbClr val="8A6D1E"/>
                 </a:solidFill>
                 <a:latin typeface="Amiri" pitchFamily="2" charset="-78"/>
+                <a:ea typeface="Amiri" pitchFamily="2" charset="-78"/>
                 <a:cs typeface="Amiri" pitchFamily="2" charset="-78"/>
               </a:rPr>
               <a:t>نَمُوذَجُ الإِجَابَةِ</a:t>
@@ -25743,6 +25920,7 @@
                   <a:srgbClr val="1B3B6F"/>
                 </a:solidFill>
                 <a:latin typeface="Amiri" pitchFamily="2" charset="-78"/>
+                <a:ea typeface="Amiri" pitchFamily="2" charset="-78"/>
                 <a:cs typeface="Amiri" pitchFamily="2" charset="-78"/>
               </a:rPr>
               <a:t>صَحِيحٌ أَنَّنَا نَقْضِي وَقْتًا أَطْوَلَ مَعَ الأَصْدِقَاءِ، غَيْرَ أَنَّ الأُسْرَةَ هِيَ الَّتِي تَبْقَى عِنْدَمَا تَصْعُبُ الأُمُورُ.</a:t>
@@ -25819,6 +25997,7 @@
                   <a:srgbClr val="1B3B6F"/>
                 </a:solidFill>
                 <a:latin typeface="Amiri" pitchFamily="2" charset="-78"/>
+                <a:ea typeface="Amiri" pitchFamily="2" charset="-78"/>
                 <a:cs typeface="Amiri" pitchFamily="2" charset="-78"/>
               </a:rPr>
               <a:t>هَلِ الأَصْدِقَاءُ أَهَمُّ مِنَ الأُسْرَةِ فِي سِنِّكَ؟</a:t>
@@ -25922,6 +26101,7 @@
                   <a:srgbClr val="1B3B6F"/>
                 </a:solidFill>
                 <a:latin typeface="Amiri" pitchFamily="2" charset="-78"/>
+                <a:ea typeface="Amiri" pitchFamily="2" charset="-78"/>
                 <a:cs typeface="Amiri" pitchFamily="2" charset="-78"/>
               </a:rPr>
               <a:t>إِلَى حَدٍّ مَا؛ فَغُرْفَتِي مَثَلًا مَلِيئَةٌ بِالكُتُبِ وَالخَرَائِطِ، وَهٰذَا يَقُولُ عَنِّي إِنِّي أَحْلُمُ بِالسَّفَرِ.</a:t>
@@ -25998,6 +26178,7 @@
                   <a:srgbClr val="1B3B6F"/>
                 </a:solidFill>
                 <a:latin typeface="Amiri" pitchFamily="2" charset="-78"/>
+                <a:ea typeface="Amiri" pitchFamily="2" charset="-78"/>
                 <a:cs typeface="Amiri" pitchFamily="2" charset="-78"/>
               </a:rPr>
               <a:t>هَلْ تُعَبِّرُ مَلَابِسُنَا وَغُرَفُنَا عَنْ هُوِيَّتِنَا؟</a:t>
@@ -26101,6 +26282,7 @@
                   <a:srgbClr val="1B3B6F"/>
                 </a:solidFill>
                 <a:latin typeface="Amiri" pitchFamily="2" charset="-78"/>
+                <a:ea typeface="Amiri" pitchFamily="2" charset="-78"/>
                 <a:cs typeface="Amiri" pitchFamily="2" charset="-78"/>
               </a:rPr>
               <a:t>كَانَ وَالِدَايَ يَلْعَبَانِ فِي الشَّارِعِ وَيَقْرَآنِ المَجَلَّاتِ، أَمَّا جِيلُنَا فَيَصْنَعُ الفِيدْيُوهَاتِ وَيَلْعَبُ مَعَ أَصْدِقَاءَ فِي بُلْدَانٍ أُخْرَى.</a:t>
@@ -26180,6 +26362,7 @@
                   <a:srgbClr val="1B3B6F"/>
                 </a:solidFill>
                 <a:latin typeface="Amiri" pitchFamily="2" charset="-78"/>
+                <a:ea typeface="Amiri" pitchFamily="2" charset="-78"/>
                 <a:cs typeface="Amiri" pitchFamily="2" charset="-78"/>
               </a:rPr>
               <a:t>كَيْفَ تَخْتَلِفُ هِوَايَاتُ جِيلِكَ عَنْ هِوَايَاتِ جِيلِ وَالِدَيْكَ؟</a:t>
@@ -26389,6 +26572,7 @@
                   <a:srgbClr val="D4AF37"/>
                 </a:solidFill>
                 <a:latin typeface="Amiri" pitchFamily="2" charset="-78"/>
+                <a:ea typeface="Amiri" pitchFamily="2" charset="-78"/>
                 <a:cs typeface="Amiri" pitchFamily="2" charset="-78"/>
               </a:rPr>
               <a:t>م</a:t>
@@ -26709,6 +26893,7 @@
                   <a:srgbClr val="8A6D1E"/>
                 </a:solidFill>
                 <a:latin typeface="Amiri" pitchFamily="2" charset="-78"/>
+                <a:ea typeface="Amiri" pitchFamily="2" charset="-78"/>
                 <a:cs typeface="Amiri" pitchFamily="2" charset="-78"/>
               </a:rPr>
               <a:t>نَمُوذَجُ الإِجَابَةِ</a:t>
@@ -26951,6 +27136,7 @@
                   <a:srgbClr val="1B3B6F"/>
                 </a:solidFill>
                 <a:latin typeface="Amiri" pitchFamily="2" charset="-78"/>
+                <a:ea typeface="Amiri" pitchFamily="2" charset="-78"/>
                 <a:cs typeface="Amiri" pitchFamily="2" charset="-78"/>
               </a:rPr>
               <a:t>عِنْدَمَا تَطَوَّعْتُ فِي دَارٍ لِلْمُسِنِّينَ، تَغَيَّرَتْ نَظْرَتِي إِلَى الحَيَاةِ، فَأَصْبَحْتُ أَصْبَرَ وَأَكْثَرَ امْتِنَانًا.</a:t>
@@ -27027,6 +27213,7 @@
                   <a:srgbClr val="1B3B6F"/>
                 </a:solidFill>
                 <a:latin typeface="Amiri" pitchFamily="2" charset="-78"/>
+                <a:ea typeface="Amiri" pitchFamily="2" charset="-78"/>
                 <a:cs typeface="Amiri" pitchFamily="2" charset="-78"/>
               </a:rPr>
               <a:t>مَا التَّجْرِبَةُ الَّتِي غَيَّرَتْ شَخْصِيَّتَكَ؟</a:t>
@@ -27130,6 +27317,7 @@
                   <a:srgbClr val="1B3B6F"/>
                 </a:solidFill>
                 <a:latin typeface="Amiri" pitchFamily="2" charset="-78"/>
+                <a:ea typeface="Amiri" pitchFamily="2" charset="-78"/>
                 <a:cs typeface="Amiri" pitchFamily="2" charset="-78"/>
               </a:rPr>
               <a:t>لَوِ اسْتَطَعْتُ، لَاخْتَرْتُ يَوْمًا فِي حَيَاةِ أُمِّي، لِكَيْ أَفْهَمَ كَيْفَ تَعْمَلُ وَتَطْبُخُ وَتَهْتَمُّ بِنَا فِي وَقْتٍ وَاحِدٍ!</a:t>
@@ -27209,6 +27397,7 @@
                   <a:srgbClr val="1B3B6F"/>
                 </a:solidFill>
                 <a:latin typeface="Amiri" pitchFamily="2" charset="-78"/>
+                <a:ea typeface="Amiri" pitchFamily="2" charset="-78"/>
                 <a:cs typeface="Amiri" pitchFamily="2" charset="-78"/>
               </a:rPr>
               <a:t>لَوِ اسْتَطَعْتَ أَنْ تَعِيشَ يَوْمًا فِي حَيَاةِ شَخْصٍ آخَرَ، مَنْ تَخْتَارُ؟</a:t>
@@ -27418,6 +27607,7 @@
                   <a:srgbClr val="D4AF37"/>
                 </a:solidFill>
                 <a:latin typeface="Amiri" pitchFamily="2" charset="-78"/>
+                <a:ea typeface="Amiri" pitchFamily="2" charset="-78"/>
                 <a:cs typeface="Amiri" pitchFamily="2" charset="-78"/>
               </a:rPr>
               <a:t>م</a:t>
@@ -27738,6 +27928,7 @@
                   <a:srgbClr val="8A6D1E"/>
                 </a:solidFill>
                 <a:latin typeface="Amiri" pitchFamily="2" charset="-78"/>
+                <a:ea typeface="Amiri" pitchFamily="2" charset="-78"/>
                 <a:cs typeface="Amiri" pitchFamily="2" charset="-78"/>
               </a:rPr>
               <a:t>قَيِّمْ عَمَلَكَ</a:t>
@@ -28982,6 +29173,7 @@
                   <a:srgbClr val="FFFFFF"/>
                 </a:solidFill>
                 <a:latin typeface="Amiri" pitchFamily="2" charset="-78"/>
+                <a:ea typeface="Amiri" pitchFamily="2" charset="-78"/>
                 <a:cs typeface="Amiri" pitchFamily="2" charset="-78"/>
               </a:rPr>
               <a:t>أَحْسَنْتُمْ! إِلَى اللِّقَاءِ</a:t>
@@ -29134,6 +29326,7 @@
                   <a:srgbClr val="D4AF37"/>
                 </a:solidFill>
                 <a:latin typeface="Amiri" pitchFamily="2" charset="-78"/>
+                <a:ea typeface="Amiri" pitchFamily="2" charset="-78"/>
                 <a:cs typeface="Amiri" pitchFamily="2" charset="-78"/>
               </a:rPr>
               <a:t>وَرْشَةُ الكِتَابَةِ</a:t>
@@ -29267,6 +29460,7 @@
                   <a:srgbClr val="D4AF37"/>
                 </a:solidFill>
                 <a:latin typeface="Amiri" pitchFamily="2" charset="-78"/>
+                <a:ea typeface="Amiri" pitchFamily="2" charset="-78"/>
                 <a:cs typeface="Amiri" pitchFamily="2" charset="-78"/>
               </a:rPr>
               <a:t>م</a:t>
@@ -29587,6 +29781,7 @@
                   <a:srgbClr val="8A6D1E"/>
                 </a:solidFill>
                 <a:latin typeface="Amiri" pitchFamily="2" charset="-78"/>
+                <a:ea typeface="Amiri" pitchFamily="2" charset="-78"/>
                 <a:cs typeface="Amiri" pitchFamily="2" charset="-78"/>
               </a:rPr>
               <a:t>خَرِيطَةُ الوَرْشَةِ</a:t>
@@ -29901,6 +30096,7 @@
                   <a:srgbClr val="1B3B6F"/>
                 </a:solidFill>
                 <a:latin typeface="Amiri" pitchFamily="2" charset="-78"/>
+                <a:ea typeface="Amiri" pitchFamily="2" charset="-78"/>
                 <a:cs typeface="Amiri" pitchFamily="2" charset="-78"/>
               </a:rPr>
               <a:t>كَيْفَ</a:t>
@@ -30177,6 +30373,7 @@
                   <a:srgbClr val="1E6B52"/>
                 </a:solidFill>
                 <a:latin typeface="Amiri" pitchFamily="2" charset="-78"/>
+                <a:ea typeface="Amiri" pitchFamily="2" charset="-78"/>
                 <a:cs typeface="Amiri" pitchFamily="2" charset="-78"/>
               </a:rPr>
               <a:t>تَمْثِيلُ الدَّوْرِ</a:t>
@@ -30453,6 +30650,7 @@
                   <a:srgbClr val="8A6D1E"/>
                 </a:solidFill>
                 <a:latin typeface="Amiri" pitchFamily="2" charset="-78"/>
+                <a:ea typeface="Amiri" pitchFamily="2" charset="-78"/>
                 <a:cs typeface="Amiri" pitchFamily="2" charset="-78"/>
               </a:rPr>
               <a:t>النَّمُوذَجُ</a:t>
@@ -30729,6 +30927,7 @@
                   <a:srgbClr val="1E6B52"/>
                 </a:solidFill>
                 <a:latin typeface="Amiri" pitchFamily="2" charset="-78"/>
+                <a:ea typeface="Amiri" pitchFamily="2" charset="-78"/>
                 <a:cs typeface="Amiri" pitchFamily="2" charset="-78"/>
               </a:rPr>
               <a:t>المُحَادَثَةُ</a:t>
@@ -31005,6 +31204,7 @@
                   <a:srgbClr val="8A6D1E"/>
                 </a:solidFill>
                 <a:latin typeface="Amiri" pitchFamily="2" charset="-78"/>
+                <a:ea typeface="Amiri" pitchFamily="2" charset="-78"/>
                 <a:cs typeface="Amiri" pitchFamily="2" charset="-78"/>
               </a:rPr>
               <a:t>قَيِّمْ</a:t>
@@ -31248,6 +31448,7 @@
                   <a:srgbClr val="D4AF37"/>
                 </a:solidFill>
                 <a:latin typeface="Amiri" pitchFamily="2" charset="-78"/>
+                <a:ea typeface="Amiri" pitchFamily="2" charset="-78"/>
                 <a:cs typeface="Amiri" pitchFamily="2" charset="-78"/>
               </a:rPr>
               <a:t>م</a:t>
@@ -31568,6 +31769,7 @@
                   <a:srgbClr val="8A6D1E"/>
                 </a:solidFill>
                 <a:latin typeface="Amiri" pitchFamily="2" charset="-78"/>
+                <a:ea typeface="Amiri" pitchFamily="2" charset="-78"/>
                 <a:cs typeface="Amiri" pitchFamily="2" charset="-78"/>
               </a:rPr>
               <a:t>امْتِحَانُ التَّحَدُّثِ</a:t>
@@ -32192,6 +32394,7 @@
                   <a:srgbClr val="1B3B6F"/>
                 </a:solidFill>
                 <a:latin typeface="Amiri" pitchFamily="2" charset="-78"/>
+                <a:ea typeface="Amiri" pitchFamily="2" charset="-78"/>
                 <a:cs typeface="Amiri" pitchFamily="2" charset="-78"/>
               </a:rPr>
               <a:t>عَفْوًا، هَلْ يُمْكِنُ أَنْ تُعِيدَ السُّؤَالَ؟</a:t>
@@ -32291,6 +32494,7 @@
                   <a:srgbClr val="1B3B6F"/>
                 </a:solidFill>
                 <a:latin typeface="Amiri" pitchFamily="2" charset="-78"/>
+                <a:ea typeface="Amiri" pitchFamily="2" charset="-78"/>
                 <a:cs typeface="Amiri" pitchFamily="2" charset="-78"/>
               </a:rPr>
               <a:t>لَحْظَةً، دَعْنِي أُفَكِّرُ …</a:t>
@@ -32390,6 +32594,7 @@
                   <a:srgbClr val="1B3B6F"/>
                 </a:solidFill>
                 <a:latin typeface="Amiri" pitchFamily="2" charset="-78"/>
+                <a:ea typeface="Amiri" pitchFamily="2" charset="-78"/>
                 <a:cs typeface="Amiri" pitchFamily="2" charset="-78"/>
               </a:rPr>
               <a:t>أَقْصِدُ …</a:t>
@@ -32561,6 +32766,7 @@
                   <a:srgbClr val="D4AF37"/>
                 </a:solidFill>
                 <a:latin typeface="Amiri" pitchFamily="2" charset="-78"/>
+                <a:ea typeface="Amiri" pitchFamily="2" charset="-78"/>
                 <a:cs typeface="Amiri" pitchFamily="2" charset="-78"/>
               </a:rPr>
               <a:t>م</a:t>
@@ -32881,6 +33087,7 @@
                   <a:srgbClr val="8A6D1E"/>
                 </a:solidFill>
                 <a:latin typeface="Amiri" pitchFamily="2" charset="-78"/>
+                <a:ea typeface="Amiri" pitchFamily="2" charset="-78"/>
                 <a:cs typeface="Amiri" pitchFamily="2" charset="-78"/>
               </a:rPr>
               <a:t>أَدَوَاتُ الرَّبْطِ</a:t>
@@ -33184,6 +33391,7 @@
                   <a:srgbClr val="1B3B6F"/>
                 </a:solidFill>
                 <a:latin typeface="Amiri" pitchFamily="2" charset="-78"/>
+                <a:ea typeface="Amiri" pitchFamily="2" charset="-78"/>
                 <a:cs typeface="Amiri" pitchFamily="2" charset="-78"/>
               </a:rPr>
               <a:t>لِأَنَّ · لِذٰلِكَ</a:t>
@@ -33503,6 +33711,7 @@
                   <a:srgbClr val="1B3B6F"/>
                 </a:solidFill>
                 <a:latin typeface="Amiri" pitchFamily="2" charset="-78"/>
+                <a:ea typeface="Amiri" pitchFamily="2" charset="-78"/>
                 <a:cs typeface="Amiri" pitchFamily="2" charset="-78"/>
               </a:rPr>
               <a:t>لٰكِنَّ · غَيْرَ أَنَّ</a:t>
@@ -33822,6 +34031,7 @@
                   <a:srgbClr val="1B3B6F"/>
                 </a:solidFill>
                 <a:latin typeface="Amiri" pitchFamily="2" charset="-78"/>
+                <a:ea typeface="Amiri" pitchFamily="2" charset="-78"/>
                 <a:cs typeface="Amiri" pitchFamily="2" charset="-78"/>
               </a:rPr>
               <a:t>أَمَّا أَنَا فَأُحِبُّ …</a:t>
@@ -34141,6 +34351,7 @@
                   <a:srgbClr val="1B3B6F"/>
                 </a:solidFill>
                 <a:latin typeface="Amiri" pitchFamily="2" charset="-78"/>
+                <a:ea typeface="Amiri" pitchFamily="2" charset="-78"/>
                 <a:cs typeface="Amiri" pitchFamily="2" charset="-78"/>
               </a:rPr>
               <a:t>بِالإِضَافَةِ إِلَى ذٰلِكَ</a:t>
@@ -34460,6 +34671,7 @@
                   <a:srgbClr val="1B3B6F"/>
                 </a:solidFill>
                 <a:latin typeface="Amiri" pitchFamily="2" charset="-78"/>
+                <a:ea typeface="Amiri" pitchFamily="2" charset="-78"/>
                 <a:cs typeface="Amiri" pitchFamily="2" charset="-78"/>
               </a:rPr>
               <a:t>مَثَلًا</a:t>
@@ -34779,6 +34991,7 @@
                   <a:srgbClr val="1B3B6F"/>
                 </a:solidFill>
                 <a:latin typeface="Amiri" pitchFamily="2" charset="-78"/>
+                <a:ea typeface="Amiri" pitchFamily="2" charset="-78"/>
                 <a:cs typeface="Amiri" pitchFamily="2" charset="-78"/>
               </a:rPr>
               <a:t>فِي رَأْيِي</a:t>
@@ -34936,6 +35149,7 @@
                   <a:srgbClr val="1B3B6F"/>
                 </a:solidFill>
                 <a:latin typeface="Amiri" pitchFamily="2" charset="-78"/>
+                <a:ea typeface="Amiri" pitchFamily="2" charset="-78"/>
                 <a:cs typeface="Amiri" pitchFamily="2" charset="-78"/>
               </a:rPr>
               <a:t>أَشْعُرُ أَنَّ</a:t>
@@ -35039,6 +35253,7 @@
                   <a:srgbClr val="1B3B6F"/>
                 </a:solidFill>
                 <a:latin typeface="Amiri" pitchFamily="2" charset="-78"/>
+                <a:ea typeface="Amiri" pitchFamily="2" charset="-78"/>
                 <a:cs typeface="Amiri" pitchFamily="2" charset="-78"/>
               </a:rPr>
               <a:t>أَعْتَقِدُ أَنَّ</a:t>
@@ -35172,6 +35387,7 @@
                   <a:srgbClr val="D4AF37"/>
                 </a:solidFill>
                 <a:latin typeface="Amiri" pitchFamily="2" charset="-78"/>
+                <a:ea typeface="Amiri" pitchFamily="2" charset="-78"/>
                 <a:cs typeface="Amiri" pitchFamily="2" charset="-78"/>
               </a:rPr>
               <a:t>م</a:t>
@@ -35492,6 +35708,7 @@
                   <a:srgbClr val="8A6D1E"/>
                 </a:solidFill>
                 <a:latin typeface="Amiri" pitchFamily="2" charset="-78"/>
+                <a:ea typeface="Amiri" pitchFamily="2" charset="-78"/>
                 <a:cs typeface="Amiri" pitchFamily="2" charset="-78"/>
               </a:rPr>
               <a:t>المَاضِي وَالحَاضِرُ وَالمُسْتَقْبَلُ</a:t>
@@ -35795,6 +36012,7 @@
                   <a:srgbClr val="1B3B6F"/>
                 </a:solidFill>
                 <a:latin typeface="Amiri" pitchFamily="2" charset="-78"/>
+                <a:ea typeface="Amiri" pitchFamily="2" charset="-78"/>
                 <a:cs typeface="Amiri" pitchFamily="2" charset="-78"/>
               </a:rPr>
               <a:t>عِنْدَمَا كُنْتُ صَغِيرًا</a:t>
@@ -35952,6 +36170,7 @@
                   <a:srgbClr val="1B3B6F"/>
                 </a:solidFill>
                 <a:latin typeface="Amiri" pitchFamily="2" charset="-78"/>
+                <a:ea typeface="Amiri" pitchFamily="2" charset="-78"/>
                 <a:cs typeface="Amiri" pitchFamily="2" charset="-78"/>
               </a:rPr>
               <a:t>صَغِيرَةً</a:t>
@@ -36217,6 +36436,7 @@
                   <a:srgbClr val="1B3B6F"/>
                 </a:solidFill>
                 <a:latin typeface="Amiri" pitchFamily="2" charset="-78"/>
+                <a:ea typeface="Amiri" pitchFamily="2" charset="-78"/>
                 <a:cs typeface="Amiri" pitchFamily="2" charset="-78"/>
               </a:rPr>
               <a:t>فِي المُسْتَقْبَلِ سَأَدْرُسُ …</a:t>
@@ -36374,6 +36594,7 @@
                   <a:srgbClr val="1B3B6F"/>
                 </a:solidFill>
                 <a:latin typeface="Amiri" pitchFamily="2" charset="-78"/>
+                <a:ea typeface="Amiri" pitchFamily="2" charset="-78"/>
                 <a:cs typeface="Amiri" pitchFamily="2" charset="-78"/>
               </a:rPr>
               <a:t>أُخَطِّطُ لِلسَّفَرِ</a:t>
@@ -36477,6 +36698,7 @@
                   <a:srgbClr val="1B3B6F"/>
                 </a:solidFill>
                 <a:latin typeface="Amiri" pitchFamily="2" charset="-78"/>
+                <a:ea typeface="Amiri" pitchFamily="2" charset="-78"/>
                 <a:cs typeface="Amiri" pitchFamily="2" charset="-78"/>
               </a:rPr>
               <a:t>أَتَمَنَّى أَنْ</a:t>
@@ -36742,6 +36964,7 @@
                   <a:srgbClr val="1B3B6F"/>
                 </a:solidFill>
                 <a:latin typeface="Amiri" pitchFamily="2" charset="-78"/>
+                <a:ea typeface="Amiri" pitchFamily="2" charset="-78"/>
                 <a:cs typeface="Amiri" pitchFamily="2" charset="-78"/>
               </a:rPr>
               <a:t>أَكْثَرُ … مِنْ</a:t>
@@ -36899,6 +37122,7 @@
                   <a:srgbClr val="1B3B6F"/>
                 </a:solidFill>
                 <a:latin typeface="Amiri" pitchFamily="2" charset="-78"/>
+                <a:ea typeface="Amiri" pitchFamily="2" charset="-78"/>
                 <a:cs typeface="Amiri" pitchFamily="2" charset="-78"/>
               </a:rPr>
               <a:t>أَفْضَلُ …</a:t>
@@ -37002,6 +37226,7 @@
                   <a:srgbClr val="1B3B6F"/>
                 </a:solidFill>
                 <a:latin typeface="Amiri" pitchFamily="2" charset="-78"/>
+                <a:ea typeface="Amiri" pitchFamily="2" charset="-78"/>
                 <a:cs typeface="Amiri" pitchFamily="2" charset="-78"/>
               </a:rPr>
               <a:t>أَفْضَلُ مِنْ</a:t>
@@ -37267,6 +37492,7 @@
                   <a:srgbClr val="1B3B6F"/>
                 </a:solidFill>
                 <a:latin typeface="Amiri" pitchFamily="2" charset="-78"/>
+                <a:ea typeface="Amiri" pitchFamily="2" charset="-78"/>
                 <a:cs typeface="Amiri" pitchFamily="2" charset="-78"/>
               </a:rPr>
               <a:t>صَحِيحٌ أَنَّ … غَيْرَ أَنَّ …</a:t>
@@ -37586,6 +37812,7 @@
                   <a:srgbClr val="1B3B6F"/>
                 </a:solidFill>
                 <a:latin typeface="Amiri" pitchFamily="2" charset="-78"/>
+                <a:ea typeface="Amiri" pitchFamily="2" charset="-78"/>
                 <a:cs typeface="Amiri" pitchFamily="2" charset="-78"/>
               </a:rPr>
               <a:t>لَوْ كُنْتُ … لَسَافَرْتُ</a:t>
@@ -37905,6 +38132,7 @@
                   <a:srgbClr val="1B3B6F"/>
                 </a:solidFill>
                 <a:latin typeface="Amiri" pitchFamily="2" charset="-78"/>
+                <a:ea typeface="Amiri" pitchFamily="2" charset="-78"/>
                 <a:cs typeface="Amiri" pitchFamily="2" charset="-78"/>
               </a:rPr>
               <a:t>أَتَأَكَّدُ مِنْ …</a:t>
@@ -38062,6 +38290,7 @@
                   <a:srgbClr val="1B3B6F"/>
                 </a:solidFill>
                 <a:latin typeface="Amiri" pitchFamily="2" charset="-78"/>
+                <a:ea typeface="Amiri" pitchFamily="2" charset="-78"/>
                 <a:cs typeface="Amiri" pitchFamily="2" charset="-78"/>
               </a:rPr>
               <a:t>يَتَأَكَّدُ</a:t>
@@ -38165,6 +38394,7 @@
                   <a:srgbClr val="1B3B6F"/>
                 </a:solidFill>
                 <a:latin typeface="Amiri" pitchFamily="2" charset="-78"/>
+                <a:ea typeface="Amiri" pitchFamily="2" charset="-78"/>
                 <a:cs typeface="Amiri" pitchFamily="2" charset="-78"/>
               </a:rPr>
               <a:t>تَأَكَّدْتُ</a:t>
@@ -38298,6 +38528,7 @@
                   <a:srgbClr val="D4AF37"/>
                 </a:solidFill>
                 <a:latin typeface="Amiri" pitchFamily="2" charset="-78"/>
+                <a:ea typeface="Amiri" pitchFamily="2" charset="-78"/>
                 <a:cs typeface="Amiri" pitchFamily="2" charset="-78"/>
               </a:rPr>
               <a:t>م</a:t>
@@ -38618,6 +38849,7 @@
                   <a:srgbClr val="8A6D1E"/>
                 </a:solidFill>
                 <a:latin typeface="Amiri" pitchFamily="2" charset="-78"/>
+                <a:ea typeface="Amiri" pitchFamily="2" charset="-78"/>
                 <a:cs typeface="Amiri" pitchFamily="2" charset="-78"/>
               </a:rPr>
               <a:t>فِي الغُرَفِ</a:t>
@@ -39794,6 +40026,7 @@
                   <a:srgbClr val="1B3B6F"/>
                 </a:solidFill>
                 <a:latin typeface="Amiri" pitchFamily="2" charset="-78"/>
+                <a:ea typeface="Amiri" pitchFamily="2" charset="-78"/>
                 <a:cs typeface="Amiri" pitchFamily="2" charset="-78"/>
               </a:rPr>
               <a:t>دَوْرُكَ!</a:t>
@@ -39870,6 +40103,7 @@
                   <a:srgbClr val="1B3B6F"/>
                 </a:solidFill>
                 <a:latin typeface="Amiri" pitchFamily="2" charset="-78"/>
+                <a:ea typeface="Amiri" pitchFamily="2" charset="-78"/>
                 <a:cs typeface="Amiri" pitchFamily="2" charset="-78"/>
               </a:rPr>
               <a:t>أَحْسَنْتَ! / أَحْسَنْتِ!</a:t>
@@ -39946,6 +40180,7 @@
                   <a:srgbClr val="1B3B6F"/>
                 </a:solidFill>
                 <a:latin typeface="Amiri" pitchFamily="2" charset="-78"/>
+                <a:ea typeface="Amiri" pitchFamily="2" charset="-78"/>
                 <a:cs typeface="Amiri" pitchFamily="2" charset="-78"/>
               </a:rPr>
               <a:t>تَكَلَّمْ أَكْثَرَ، مِنْ فَضْلِكَ</a:t>
@@ -40022,6 +40257,7 @@
                   <a:srgbClr val="1B3B6F"/>
                 </a:solidFill>
                 <a:latin typeface="Amiri" pitchFamily="2" charset="-78"/>
+                <a:ea typeface="Amiri" pitchFamily="2" charset="-78"/>
                 <a:cs typeface="Amiri" pitchFamily="2" charset="-78"/>
               </a:rPr>
               <a:t>لِمَاذَا؟</a:t>
@@ -40193,6 +40429,7 @@
                   <a:srgbClr val="D4AF37"/>
                 </a:solidFill>
                 <a:latin typeface="Amiri" pitchFamily="2" charset="-78"/>
+                <a:ea typeface="Amiri" pitchFamily="2" charset="-78"/>
                 <a:cs typeface="Amiri" pitchFamily="2" charset="-78"/>
               </a:rPr>
               <a:t>م</a:t>
@@ -40513,6 +40750,7 @@
                   <a:srgbClr val="8A6D1E"/>
                 </a:solidFill>
                 <a:latin typeface="Amiri" pitchFamily="2" charset="-78"/>
+                <a:ea typeface="Amiri" pitchFamily="2" charset="-78"/>
                 <a:cs typeface="Amiri" pitchFamily="2" charset="-78"/>
               </a:rPr>
               <a:t>مُقَابَلَةٌ لِلْمُخَيَّمِ الصَّيْفِيِّ</a:t>
@@ -40793,6 +41031,7 @@
                   <a:srgbClr val="1B3B6F"/>
                 </a:solidFill>
                 <a:latin typeface="Amiri" pitchFamily="2" charset="-78"/>
+                <a:ea typeface="Amiri" pitchFamily="2" charset="-78"/>
                 <a:cs typeface="Amiri" pitchFamily="2" charset="-78"/>
               </a:rPr>
               <a:t>اسْمِي … عُمْرِي … أَسْكُنُ …</a:t>
@@ -40869,6 +41108,7 @@
                   <a:srgbClr val="1B3B6F"/>
                 </a:solidFill>
                 <a:latin typeface="Amiri" pitchFamily="2" charset="-78"/>
+                <a:ea typeface="Amiri" pitchFamily="2" charset="-78"/>
                 <a:cs typeface="Amiri" pitchFamily="2" charset="-78"/>
               </a:rPr>
               <a:t>أَهْلًا! عَرِّفْنَا بِنَفْسِكَ.</a:t>
@@ -41037,6 +41277,7 @@
                   <a:srgbClr val="1B3B6F"/>
                 </a:solidFill>
                 <a:latin typeface="Amiri" pitchFamily="2" charset="-78"/>
+                <a:ea typeface="Amiri" pitchFamily="2" charset="-78"/>
                 <a:cs typeface="Amiri" pitchFamily="2" charset="-78"/>
               </a:rPr>
               <a:t>فِي أُسْرَتِي … أَبِي … وَأُمِّي …</a:t>
@@ -41113,6 +41354,7 @@
                   <a:srgbClr val="1B3B6F"/>
                 </a:solidFill>
                 <a:latin typeface="Amiri" pitchFamily="2" charset="-78"/>
+                <a:ea typeface="Amiri" pitchFamily="2" charset="-78"/>
                 <a:cs typeface="Amiri" pitchFamily="2" charset="-78"/>
               </a:rPr>
               <a:t>مَنْ فِي أُسْرَتِكَ؟</a:t>
@@ -41281,6 +41523,7 @@
                   <a:srgbClr val="1B3B6F"/>
                 </a:solidFill>
                 <a:latin typeface="Amiri" pitchFamily="2" charset="-78"/>
+                <a:ea typeface="Amiri" pitchFamily="2" charset="-78"/>
                 <a:cs typeface="Amiri" pitchFamily="2" charset="-78"/>
               </a:rPr>
               <a:t>أَنَا … وَ…</a:t>
@@ -41357,6 +41600,7 @@
                   <a:srgbClr val="1B3B6F"/>
                 </a:solidFill>
                 <a:latin typeface="Amiri" pitchFamily="2" charset="-78"/>
+                <a:ea typeface="Amiri" pitchFamily="2" charset="-78"/>
                 <a:cs typeface="Amiri" pitchFamily="2" charset="-78"/>
               </a:rPr>
               <a:t>صِفْ شَخْصِيَّتَكَ.</a:t>
@@ -41525,6 +41769,7 @@
                   <a:srgbClr val="1B3B6F"/>
                 </a:solidFill>
                 <a:latin typeface="Amiri" pitchFamily="2" charset="-78"/>
+                <a:ea typeface="Amiri" pitchFamily="2" charset="-78"/>
                 <a:cs typeface="Amiri" pitchFamily="2" charset="-78"/>
               </a:rPr>
               <a:t>أُحِبُّ … وَأُمَارِسُ … مَرَّتَيْنِ …</a:t>
@@ -41601,6 +41846,7 @@
                   <a:srgbClr val="1B3B6F"/>
                 </a:solidFill>
                 <a:latin typeface="Amiri" pitchFamily="2" charset="-78"/>
+                <a:ea typeface="Amiri" pitchFamily="2" charset="-78"/>
                 <a:cs typeface="Amiri" pitchFamily="2" charset="-78"/>
               </a:rPr>
               <a:t>مَا هِوَايَاتُكَ؟</a:t>
@@ -41769,6 +42015,7 @@
                   <a:srgbClr val="1B3B6F"/>
                 </a:solidFill>
                 <a:latin typeface="Amiri" pitchFamily="2" charset="-78"/>
+                <a:ea typeface="Amiri" pitchFamily="2" charset="-78"/>
                 <a:cs typeface="Amiri" pitchFamily="2" charset="-78"/>
               </a:rPr>
               <a:t>لِأَنِّي أُرِيدُ أَنْ …</a:t>
@@ -41845,6 +42092,7 @@
                   <a:srgbClr val="1B3B6F"/>
                 </a:solidFill>
                 <a:latin typeface="Amiri" pitchFamily="2" charset="-78"/>
+                <a:ea typeface="Amiri" pitchFamily="2" charset="-78"/>
                 <a:cs typeface="Amiri" pitchFamily="2" charset="-78"/>
               </a:rPr>
               <a:t>لِمَاذَا تُرِيدُ أَنْ تَأْتِيَ إِلَى المُخَيَّمِ؟</a:t>
@@ -42119,6 +42367,7 @@
                   <a:srgbClr val="D4AF37"/>
                 </a:solidFill>
                 <a:latin typeface="Amiri" pitchFamily="2" charset="-78"/>
+                <a:ea typeface="Amiri" pitchFamily="2" charset="-78"/>
                 <a:cs typeface="Amiri" pitchFamily="2" charset="-78"/>
               </a:rPr>
               <a:t>م</a:t>
@@ -42439,6 +42688,7 @@
                   <a:srgbClr val="8A6D1E"/>
                 </a:solidFill>
                 <a:latin typeface="Amiri" pitchFamily="2" charset="-78"/>
+                <a:ea typeface="Amiri" pitchFamily="2" charset="-78"/>
                 <a:cs typeface="Amiri" pitchFamily="2" charset="-78"/>
               </a:rPr>
               <a:t>مَعَ الأُسْرَةِ المُضِيفَةِ</a:t>
@@ -42719,6 +42969,7 @@
                   <a:srgbClr val="1B3B6F"/>
                 </a:solidFill>
                 <a:latin typeface="Amiri" pitchFamily="2" charset="-78"/>
+                <a:ea typeface="Amiri" pitchFamily="2" charset="-78"/>
                 <a:cs typeface="Amiri" pitchFamily="2" charset="-78"/>
               </a:rPr>
               <a:t>نَسْكُنُ فِي … فِيهِ … وَ…</a:t>
@@ -42795,6 +43046,7 @@
                   <a:srgbClr val="1B3B6F"/>
                 </a:solidFill>
                 <a:latin typeface="Amiri" pitchFamily="2" charset="-78"/>
+                <a:ea typeface="Amiri" pitchFamily="2" charset="-78"/>
                 <a:cs typeface="Amiri" pitchFamily="2" charset="-78"/>
               </a:rPr>
               <a:t>صِفْ لَنَا بَيْتَكَ.</a:t>
@@ -42963,6 +43215,7 @@
                   <a:srgbClr val="1B3B6F"/>
                 </a:solidFill>
                 <a:latin typeface="Amiri" pitchFamily="2" charset="-78"/>
+                <a:ea typeface="Amiri" pitchFamily="2" charset="-78"/>
                 <a:cs typeface="Amiri" pitchFamily="2" charset="-78"/>
               </a:rPr>
               <a:t>نَعَمْ / لَا، … لِأَنَّ …</a:t>
@@ -43039,6 +43292,7 @@
                   <a:srgbClr val="1B3B6F"/>
                 </a:solidFill>
                 <a:latin typeface="Amiri" pitchFamily="2" charset="-78"/>
+                <a:ea typeface="Amiri" pitchFamily="2" charset="-78"/>
                 <a:cs typeface="Amiri" pitchFamily="2" charset="-78"/>
               </a:rPr>
               <a:t>هَلْ تُشَارِكُ غُرْفَتَكَ مَعَ أَحَدٍ؟</a:t>
@@ -43207,6 +43461,7 @@
                   <a:srgbClr val="1B3B6F"/>
                 </a:solidFill>
                 <a:latin typeface="Amiri" pitchFamily="2" charset="-78"/>
+                <a:ea typeface="Amiri" pitchFamily="2" charset="-78"/>
                 <a:cs typeface="Amiri" pitchFamily="2" charset="-78"/>
               </a:rPr>
               <a:t>أُحِبُّ … لٰكِنِّي لَا آكُلُ …</a:t>
@@ -43283,6 +43538,7 @@
                   <a:srgbClr val="1B3B6F"/>
                 </a:solidFill>
                 <a:latin typeface="Amiri" pitchFamily="2" charset="-78"/>
+                <a:ea typeface="Amiri" pitchFamily="2" charset="-78"/>
                 <a:cs typeface="Amiri" pitchFamily="2" charset="-78"/>
               </a:rPr>
               <a:t>مَاذَا تُحِبُّ أَنْ تَأْكُلَ؟</a:t>
@@ -43386,6 +43642,7 @@
                   <a:srgbClr val="1B3B6F"/>
                 </a:solidFill>
                 <a:latin typeface="Amiri" pitchFamily="2" charset="-78"/>
+                <a:ea typeface="Amiri" pitchFamily="2" charset="-78"/>
                 <a:cs typeface="Amiri" pitchFamily="2" charset="-78"/>
               </a:rPr>
               <a:t>مَا اسْمُهُ؟ وَمَاذَا …؟</a:t>
@@ -43462,6 +43719,7 @@
                   <a:srgbClr val="1B3B6F"/>
                 </a:solidFill>
                 <a:latin typeface="Amiri" pitchFamily="2" charset="-78"/>
+                <a:ea typeface="Amiri" pitchFamily="2" charset="-78"/>
                 <a:cs typeface="Amiri" pitchFamily="2" charset="-78"/>
               </a:rPr>
               <a:t>… عِنْدَنَا ابْنٌ فِي عُمْرِكَ.</a:t>
@@ -43565,6 +43823,7 @@
                   <a:srgbClr val="1B3B6F"/>
                 </a:solidFill>
                 <a:latin typeface="Amiri" pitchFamily="2" charset="-78"/>
+                <a:ea typeface="Amiri" pitchFamily="2" charset="-78"/>
                 <a:cs typeface="Amiri" pitchFamily="2" charset="-78"/>
               </a:rPr>
               <a:t>سَأُحْضِرُ … لِأَنَّ …</a:t>
@@ -43641,6 +43900,7 @@
                   <a:srgbClr val="1B3B6F"/>
                 </a:solidFill>
                 <a:latin typeface="Amiri" pitchFamily="2" charset="-78"/>
+                <a:ea typeface="Amiri" pitchFamily="2" charset="-78"/>
                 <a:cs typeface="Amiri" pitchFamily="2" charset="-78"/>
               </a:rPr>
               <a:t>مَاذَا سَتُحْضِرُ مَعَكَ مِنْ بِرِيطَانِيَا؟</a:t>
@@ -43815,13 +44075,9 @@
     <a:fontScheme name="Office">
       <a:majorFont>
         <a:latin typeface="Calibri Light" panose="020F0302020204030204"/>
-        <a:ea typeface=""/>
-        <a:cs typeface=""/>
-        <a:font script="Jpan" typeface="游ゴシック Light"/>
-        <a:font script="Hang" typeface="맑은 고딕"/>
-        <a:font script="Hans" typeface="等线 Light"/>
-        <a:font script="Hant" typeface="新細明體"/>
-        <a:font script="Arab" typeface="Times New Roman"/>
+        <a:ea typeface="Amiri" pitchFamily="2" charset="-78"/>
+        <a:cs typeface="Amiri" pitchFamily="2" charset="-78"/>
+        <a:font script="Arab" typeface="Amiri"/>
         <a:font script="Hebr" typeface="Times New Roman"/>
         <a:font script="Thai" typeface="Angsana New"/>
         <a:font script="Ethi" typeface="Nyala"/>
@@ -43867,13 +44123,9 @@
       </a:majorFont>
       <a:minorFont>
         <a:latin typeface="Calibri" panose="020F0502020204030204"/>
-        <a:ea typeface=""/>
-        <a:cs typeface=""/>
-        <a:font script="Jpan" typeface="游ゴシック"/>
-        <a:font script="Hang" typeface="맑은 고딕"/>
-        <a:font script="Hans" typeface="等线"/>
-        <a:font script="Hant" typeface="新細明體"/>
-        <a:font script="Arab" typeface="Arial"/>
+        <a:ea typeface="Amiri" pitchFamily="2" charset="-78"/>
+        <a:cs typeface="Amiri" pitchFamily="2" charset="-78"/>
+        <a:font script="Arab" typeface="Amiri"/>
         <a:font script="Hebr" typeface="Arial"/>
         <a:font script="Thai" typeface="Cordia New"/>
         <a:font script="Ethi" typeface="Nyala"/>
